--- a/Fase3/03_results/Evaluación AgenteRL_F3– Plataforma Inclinada.pptx
+++ b/Fase3/03_results/Evaluación AgenteRL_F3– Plataforma Inclinada.pptx
@@ -110,6 +110,11 @@
       </a:defRPr>
     </a:lvl9pPr>
   </p:defaultTextStyle>
+  <p:extLst>
+    <p:ext uri="{EFAFB233-063F-42B5-8137-9DF3F51BA10A}">
+      <p15:sldGuideLst xmlns:p15="http://schemas.microsoft.com/office/powerpoint/2012/main"/>
+    </p:ext>
+  </p:extLst>
 </p:presentation>
 </file>
 
@@ -262,7 +267,7 @@
           <a:p>
             <a:fld id="{9391BE0D-0604-1F4B-AC66-9F97D0667034}" type="datetimeFigureOut">
               <a:rPr lang="es-ES_tradnl" smtClean="0"/>
-              <a:t>29/3/26</a:t>
+              <a:t>6/4/26</a:t>
             </a:fld>
             <a:endParaRPr lang="es-ES_tradnl"/>
           </a:p>
@@ -462,7 +467,7 @@
           <a:p>
             <a:fld id="{9391BE0D-0604-1F4B-AC66-9F97D0667034}" type="datetimeFigureOut">
               <a:rPr lang="es-ES_tradnl" smtClean="0"/>
-              <a:t>29/3/26</a:t>
+              <a:t>6/4/26</a:t>
             </a:fld>
             <a:endParaRPr lang="es-ES_tradnl"/>
           </a:p>
@@ -672,7 +677,7 @@
           <a:p>
             <a:fld id="{9391BE0D-0604-1F4B-AC66-9F97D0667034}" type="datetimeFigureOut">
               <a:rPr lang="es-ES_tradnl" smtClean="0"/>
-              <a:t>29/3/26</a:t>
+              <a:t>6/4/26</a:t>
             </a:fld>
             <a:endParaRPr lang="es-ES_tradnl"/>
           </a:p>
@@ -1726,7 +1731,7 @@
           <a:p>
             <a:fld id="{9391BE0D-0604-1F4B-AC66-9F97D0667034}" type="datetimeFigureOut">
               <a:rPr lang="es-ES_tradnl" smtClean="0"/>
-              <a:t>29/3/26</a:t>
+              <a:t>6/4/26</a:t>
             </a:fld>
             <a:endParaRPr lang="es-ES_tradnl"/>
           </a:p>
@@ -2002,7 +2007,7 @@
           <a:p>
             <a:fld id="{9391BE0D-0604-1F4B-AC66-9F97D0667034}" type="datetimeFigureOut">
               <a:rPr lang="es-ES_tradnl" smtClean="0"/>
-              <a:t>29/3/26</a:t>
+              <a:t>6/4/26</a:t>
             </a:fld>
             <a:endParaRPr lang="es-ES_tradnl"/>
           </a:p>
@@ -2270,7 +2275,7 @@
           <a:p>
             <a:fld id="{9391BE0D-0604-1F4B-AC66-9F97D0667034}" type="datetimeFigureOut">
               <a:rPr lang="es-ES_tradnl" smtClean="0"/>
-              <a:t>29/3/26</a:t>
+              <a:t>6/4/26</a:t>
             </a:fld>
             <a:endParaRPr lang="es-ES_tradnl"/>
           </a:p>
@@ -2685,7 +2690,7 @@
           <a:p>
             <a:fld id="{9391BE0D-0604-1F4B-AC66-9F97D0667034}" type="datetimeFigureOut">
               <a:rPr lang="es-ES_tradnl" smtClean="0"/>
-              <a:t>29/3/26</a:t>
+              <a:t>6/4/26</a:t>
             </a:fld>
             <a:endParaRPr lang="es-ES_tradnl"/>
           </a:p>
@@ -2827,7 +2832,7 @@
           <a:p>
             <a:fld id="{9391BE0D-0604-1F4B-AC66-9F97D0667034}" type="datetimeFigureOut">
               <a:rPr lang="es-ES_tradnl" smtClean="0"/>
-              <a:t>29/3/26</a:t>
+              <a:t>6/4/26</a:t>
             </a:fld>
             <a:endParaRPr lang="es-ES_tradnl"/>
           </a:p>
@@ -2940,7 +2945,7 @@
           <a:p>
             <a:fld id="{9391BE0D-0604-1F4B-AC66-9F97D0667034}" type="datetimeFigureOut">
               <a:rPr lang="es-ES_tradnl" smtClean="0"/>
-              <a:t>29/3/26</a:t>
+              <a:t>6/4/26</a:t>
             </a:fld>
             <a:endParaRPr lang="es-ES_tradnl"/>
           </a:p>
@@ -3253,7 +3258,7 @@
           <a:p>
             <a:fld id="{9391BE0D-0604-1F4B-AC66-9F97D0667034}" type="datetimeFigureOut">
               <a:rPr lang="es-ES_tradnl" smtClean="0"/>
-              <a:t>29/3/26</a:t>
+              <a:t>6/4/26</a:t>
             </a:fld>
             <a:endParaRPr lang="es-ES_tradnl"/>
           </a:p>
@@ -3542,7 +3547,7 @@
           <a:p>
             <a:fld id="{9391BE0D-0604-1F4B-AC66-9F97D0667034}" type="datetimeFigureOut">
               <a:rPr lang="es-ES_tradnl" smtClean="0"/>
-              <a:t>29/3/26</a:t>
+              <a:t>6/4/26</a:t>
             </a:fld>
             <a:endParaRPr lang="es-ES_tradnl"/>
           </a:p>
@@ -3785,7 +3790,7 @@
           <a:p>
             <a:fld id="{9391BE0D-0604-1F4B-AC66-9F97D0667034}" type="datetimeFigureOut">
               <a:rPr lang="es-ES_tradnl" smtClean="0"/>
-              <a:t>29/3/26</a:t>
+              <a:t>6/4/26</a:t>
             </a:fld>
             <a:endParaRPr lang="es-ES_tradnl"/>
           </a:p>
@@ -4364,38 +4369,6 @@
           </a:p>
         </p:txBody>
       </p:sp>
-      <p:pic>
-        <p:nvPicPr>
-          <p:cNvPr id="8" name="Onlinebild-Platzhalter 7">
-            <a:extLst>
-              <a:ext uri="{FF2B5EF4-FFF2-40B4-BE49-F238E27FC236}">
-                <a16:creationId xmlns:a16="http://schemas.microsoft.com/office/drawing/2014/main" id="{375207D7-D848-55F8-9437-57CD5F54F3B6}"/>
-              </a:ext>
-            </a:extLst>
-          </p:cNvPr>
-          <p:cNvPicPr>
-            <a:picLocks noGrp="1" noChangeAspect="1"/>
-          </p:cNvPicPr>
-          <p:nvPr>
-            <p:ph type="clipArt" sz="quarter" idx="15"/>
-          </p:nvPr>
-        </p:nvPicPr>
-        <p:blipFill>
-          <a:blip r:embed="rId2"/>
-          <a:stretch>
-            <a:fillRect/>
-          </a:stretch>
-        </p:blipFill>
-        <p:spPr>
-          <a:xfrm>
-            <a:off x="583920" y="2151063"/>
-            <a:ext cx="5239310" cy="4008437"/>
-          </a:xfrm>
-          <a:prstGeom prst="rect">
-            <a:avLst/>
-          </a:prstGeom>
-        </p:spPr>
-      </p:pic>
       <p:sp>
         <p:nvSpPr>
           <p:cNvPr id="4" name="Fußzeilenplatzhalter 2">
@@ -4525,6 +4498,38 @@
           </a:p>
         </p:txBody>
       </p:sp>
+      <p:pic>
+        <p:nvPicPr>
+          <p:cNvPr id="9" name="Onlinebild-Platzhalter 8">
+            <a:extLst>
+              <a:ext uri="{FF2B5EF4-FFF2-40B4-BE49-F238E27FC236}">
+                <a16:creationId xmlns:a16="http://schemas.microsoft.com/office/drawing/2014/main" id="{F3C64DE5-8FFD-2224-1558-FBFAE40A954F}"/>
+              </a:ext>
+            </a:extLst>
+          </p:cNvPr>
+          <p:cNvPicPr>
+            <a:picLocks noGrp="1" noChangeAspect="1"/>
+          </p:cNvPicPr>
+          <p:nvPr>
+            <p:ph type="clipArt" sz="quarter" idx="15"/>
+          </p:nvPr>
+        </p:nvPicPr>
+        <p:blipFill>
+          <a:blip r:embed="rId2"/>
+          <a:stretch>
+            <a:fillRect/>
+          </a:stretch>
+        </p:blipFill>
+        <p:spPr>
+          <a:xfrm>
+            <a:off x="520700" y="2231013"/>
+            <a:ext cx="5365750" cy="3848537"/>
+          </a:xfrm>
+          <a:prstGeom prst="rect">
+            <a:avLst/>
+          </a:prstGeom>
+        </p:spPr>
+      </p:pic>
     </p:spTree>
     <p:extLst>
       <p:ext uri="{BB962C8B-B14F-4D97-AF65-F5344CB8AC3E}">
@@ -4613,6 +4618,11 @@
           </p:cNvGraphicFramePr>
           <p:nvPr>
             <p:ph sz="quarter" idx="14"/>
+            <p:extLst>
+              <p:ext uri="{D42A27DB-BD31-4B8C-83A1-F6EECF244321}">
+                <p14:modId xmlns:p14="http://schemas.microsoft.com/office/powerpoint/2010/main" val="691298062"/>
+              </p:ext>
+            </p:extLst>
           </p:nvPr>
         </p:nvGraphicFramePr>
         <p:xfrm>
@@ -5960,17 +5970,23 @@
                         <a:buNone/>
                       </a:pPr>
                       <a:r>
-                        <a:rPr lang="es-ES_tradnl" sz="900" dirty="0">
+                        <a:rPr lang="es-ES" sz="900">
                           <a:effectLst/>
                           <a:latin typeface="Times New Roman" panose="02020603050405020304" pitchFamily="18" charset="0"/>
                           <a:ea typeface="Times New Roman" panose="02020603050405020304" pitchFamily="18" charset="0"/>
                           <a:cs typeface="Times New Roman" panose="02020603050405020304" pitchFamily="18" charset="0"/>
                         </a:rPr>
-                        <a:t>3.70</a:t>
-                      </a:r>
-                    </a:p>
-                  </a:txBody>
-                  <a:tcPr marL="68580" marR="68580" marT="0" marB="0" anchor="ctr">
+                        <a:t>2.68</a:t>
+                      </a:r>
+                      <a:endParaRPr lang="de-DE" sz="900">
+                        <a:effectLst/>
+                        <a:latin typeface="Times New Roman" panose="02020603050405020304" pitchFamily="18" charset="0"/>
+                        <a:ea typeface="Times New Roman" panose="02020603050405020304" pitchFamily="18" charset="0"/>
+                        <a:cs typeface="Times New Roman" panose="02020603050405020304" pitchFamily="18" charset="0"/>
+                      </a:endParaRPr>
+                    </a:p>
+                  </a:txBody>
+                  <a:tcPr marL="68580" marR="68580" marT="0" marB="0">
                     <a:lnT w="12700" cap="flat" cmpd="sng" algn="ctr">
                       <a:solidFill>
                         <a:schemeClr val="tx1"/>
@@ -5992,17 +6008,23 @@
                         <a:buNone/>
                       </a:pPr>
                       <a:r>
-                        <a:rPr lang="es-ES_tradnl" sz="900" dirty="0">
+                        <a:rPr lang="es-ES" sz="900">
                           <a:effectLst/>
                           <a:latin typeface="Times New Roman" panose="02020603050405020304" pitchFamily="18" charset="0"/>
                           <a:ea typeface="Times New Roman" panose="02020603050405020304" pitchFamily="18" charset="0"/>
                           <a:cs typeface="Times New Roman" panose="02020603050405020304" pitchFamily="18" charset="0"/>
                         </a:rPr>
-                        <a:t>75.09</a:t>
-                      </a:r>
-                    </a:p>
-                  </a:txBody>
-                  <a:tcPr marL="68580" marR="68580" marT="0" marB="0" anchor="ctr">
+                        <a:t>41.06</a:t>
+                      </a:r>
+                      <a:endParaRPr lang="de-DE" sz="900">
+                        <a:effectLst/>
+                        <a:latin typeface="Times New Roman" panose="02020603050405020304" pitchFamily="18" charset="0"/>
+                        <a:ea typeface="Times New Roman" panose="02020603050405020304" pitchFamily="18" charset="0"/>
+                        <a:cs typeface="Times New Roman" panose="02020603050405020304" pitchFamily="18" charset="0"/>
+                      </a:endParaRPr>
+                    </a:p>
+                  </a:txBody>
+                  <a:tcPr marL="68580" marR="68580" marT="0" marB="0">
                     <a:lnT w="12700" cap="flat" cmpd="sng" algn="ctr">
                       <a:solidFill>
                         <a:schemeClr val="tx1"/>
@@ -6024,17 +6046,23 @@
                         <a:buNone/>
                       </a:pPr>
                       <a:r>
-                        <a:rPr lang="es-ES_tradnl" sz="900" dirty="0">
+                        <a:rPr lang="es-ES" sz="900">
                           <a:effectLst/>
                           <a:latin typeface="Times New Roman" panose="02020603050405020304" pitchFamily="18" charset="0"/>
                           <a:ea typeface="Times New Roman" panose="02020603050405020304" pitchFamily="18" charset="0"/>
                           <a:cs typeface="Times New Roman" panose="02020603050405020304" pitchFamily="18" charset="0"/>
                         </a:rPr>
-                        <a:t>18.45</a:t>
-                      </a:r>
-                    </a:p>
-                  </a:txBody>
-                  <a:tcPr marL="68580" marR="68580" marT="0" marB="0" anchor="ctr">
+                        <a:t>14.84</a:t>
+                      </a:r>
+                      <a:endParaRPr lang="de-DE" sz="900">
+                        <a:effectLst/>
+                        <a:latin typeface="Times New Roman" panose="02020603050405020304" pitchFamily="18" charset="0"/>
+                        <a:ea typeface="Times New Roman" panose="02020603050405020304" pitchFamily="18" charset="0"/>
+                        <a:cs typeface="Times New Roman" panose="02020603050405020304" pitchFamily="18" charset="0"/>
+                      </a:endParaRPr>
+                    </a:p>
+                  </a:txBody>
+                  <a:tcPr marL="68580" marR="68580" marT="0" marB="0">
                     <a:lnT w="12700" cap="flat" cmpd="sng" algn="ctr">
                       <a:solidFill>
                         <a:schemeClr val="tx1"/>
@@ -6056,17 +6084,23 @@
                         <a:buNone/>
                       </a:pPr>
                       <a:r>
-                        <a:rPr lang="es-ES_tradnl" sz="900" dirty="0">
+                        <a:rPr lang="es-ES" sz="900">
                           <a:effectLst/>
                           <a:latin typeface="Times New Roman" panose="02020603050405020304" pitchFamily="18" charset="0"/>
                           <a:ea typeface="Times New Roman" panose="02020603050405020304" pitchFamily="18" charset="0"/>
                           <a:cs typeface="Times New Roman" panose="02020603050405020304" pitchFamily="18" charset="0"/>
                         </a:rPr>
-                        <a:t>57.05</a:t>
-                      </a:r>
-                    </a:p>
-                  </a:txBody>
-                  <a:tcPr marL="68580" marR="68580" marT="0" marB="0" anchor="ctr">
+                        <a:t>30.93</a:t>
+                      </a:r>
+                      <a:endParaRPr lang="de-DE" sz="900">
+                        <a:effectLst/>
+                        <a:latin typeface="Times New Roman" panose="02020603050405020304" pitchFamily="18" charset="0"/>
+                        <a:ea typeface="Times New Roman" panose="02020603050405020304" pitchFamily="18" charset="0"/>
+                        <a:cs typeface="Times New Roman" panose="02020603050405020304" pitchFamily="18" charset="0"/>
+                      </a:endParaRPr>
+                    </a:p>
+                  </a:txBody>
+                  <a:tcPr marL="68580" marR="68580" marT="0" marB="0">
                     <a:lnT w="12700" cap="flat" cmpd="sng" algn="ctr">
                       <a:solidFill>
                         <a:schemeClr val="tx1"/>
@@ -6088,7 +6122,7 @@
                         <a:buNone/>
                       </a:pPr>
                       <a:r>
-                        <a:rPr lang="es-ES_tradnl" sz="900" dirty="0">
+                        <a:rPr lang="es-ES" sz="900">
                           <a:effectLst/>
                           <a:latin typeface="Times New Roman" panose="02020603050405020304" pitchFamily="18" charset="0"/>
                           <a:ea typeface="Times New Roman" panose="02020603050405020304" pitchFamily="18" charset="0"/>
@@ -6096,9 +6130,15 @@
                         </a:rPr>
                         <a:t>NaN</a:t>
                       </a:r>
-                    </a:p>
-                  </a:txBody>
-                  <a:tcPr marL="68580" marR="68580" marT="0" marB="0" anchor="ctr">
+                      <a:endParaRPr lang="de-DE" sz="900">
+                        <a:effectLst/>
+                        <a:latin typeface="Times New Roman" panose="02020603050405020304" pitchFamily="18" charset="0"/>
+                        <a:ea typeface="Times New Roman" panose="02020603050405020304" pitchFamily="18" charset="0"/>
+                        <a:cs typeface="Times New Roman" panose="02020603050405020304" pitchFamily="18" charset="0"/>
+                      </a:endParaRPr>
+                    </a:p>
+                  </a:txBody>
+                  <a:tcPr marL="68580" marR="68580" marT="0" marB="0">
                     <a:lnT w="12700" cap="flat" cmpd="sng" algn="ctr">
                       <a:solidFill>
                         <a:schemeClr val="tx1"/>
@@ -6383,109 +6423,139 @@
                         <a:buNone/>
                       </a:pPr>
                       <a:r>
-                        <a:rPr lang="es-ES_tradnl" sz="900" dirty="0">
+                        <a:rPr lang="es-ES" sz="900">
                           <a:effectLst/>
                           <a:latin typeface="Times New Roman" panose="02020603050405020304" pitchFamily="18" charset="0"/>
                           <a:ea typeface="Times New Roman" panose="02020603050405020304" pitchFamily="18" charset="0"/>
                           <a:cs typeface="Times New Roman" panose="02020603050405020304" pitchFamily="18" charset="0"/>
                         </a:rPr>
-                        <a:t>10.00</a:t>
-                      </a:r>
-                    </a:p>
-                  </a:txBody>
-                  <a:tcPr marL="68580" marR="68580" marT="0" marB="0" anchor="ctr">
-                    <a:noFill/>
-                  </a:tcPr>
-                </a:tc>
-                <a:tc>
-                  <a:txBody>
-                    <a:bodyPr/>
-                    <a:lstStyle/>
-                    <a:p>
-                      <a:pPr algn="ctr">
-                        <a:buNone/>
-                      </a:pPr>
-                      <a:r>
-                        <a:rPr lang="es-ES_tradnl" sz="900" dirty="0">
+                        <a:t>6.00</a:t>
+                      </a:r>
+                      <a:endParaRPr lang="de-DE" sz="900">
+                        <a:effectLst/>
+                        <a:latin typeface="Times New Roman" panose="02020603050405020304" pitchFamily="18" charset="0"/>
+                        <a:ea typeface="Times New Roman" panose="02020603050405020304" pitchFamily="18" charset="0"/>
+                        <a:cs typeface="Times New Roman" panose="02020603050405020304" pitchFamily="18" charset="0"/>
+                      </a:endParaRPr>
+                    </a:p>
+                  </a:txBody>
+                  <a:tcPr marL="68580" marR="68580" marT="0" marB="0">
+                    <a:noFill/>
+                  </a:tcPr>
+                </a:tc>
+                <a:tc>
+                  <a:txBody>
+                    <a:bodyPr/>
+                    <a:lstStyle/>
+                    <a:p>
+                      <a:pPr algn="ctr">
+                        <a:buNone/>
+                      </a:pPr>
+                      <a:r>
+                        <a:rPr lang="es-ES" sz="900">
                           <a:effectLst/>
                           <a:latin typeface="Times New Roman" panose="02020603050405020304" pitchFamily="18" charset="0"/>
                           <a:ea typeface="Times New Roman" panose="02020603050405020304" pitchFamily="18" charset="0"/>
                           <a:cs typeface="Times New Roman" panose="02020603050405020304" pitchFamily="18" charset="0"/>
                         </a:rPr>
-                        <a:t>4.29</a:t>
-                      </a:r>
-                    </a:p>
-                  </a:txBody>
-                  <a:tcPr marL="68580" marR="68580" marT="0" marB="0" anchor="ctr">
-                    <a:noFill/>
-                  </a:tcPr>
-                </a:tc>
-                <a:tc>
-                  <a:txBody>
-                    <a:bodyPr/>
-                    <a:lstStyle/>
-                    <a:p>
-                      <a:pPr algn="ctr">
-                        <a:buNone/>
-                      </a:pPr>
-                      <a:r>
-                        <a:rPr lang="es-ES_tradnl" sz="900" dirty="0">
+                        <a:t>3.05</a:t>
+                      </a:r>
+                      <a:endParaRPr lang="de-DE" sz="900">
+                        <a:effectLst/>
+                        <a:latin typeface="Times New Roman" panose="02020603050405020304" pitchFamily="18" charset="0"/>
+                        <a:ea typeface="Times New Roman" panose="02020603050405020304" pitchFamily="18" charset="0"/>
+                        <a:cs typeface="Times New Roman" panose="02020603050405020304" pitchFamily="18" charset="0"/>
+                      </a:endParaRPr>
+                    </a:p>
+                  </a:txBody>
+                  <a:tcPr marL="68580" marR="68580" marT="0" marB="0">
+                    <a:noFill/>
+                  </a:tcPr>
+                </a:tc>
+                <a:tc>
+                  <a:txBody>
+                    <a:bodyPr/>
+                    <a:lstStyle/>
+                    <a:p>
+                      <a:pPr algn="ctr">
+                        <a:buNone/>
+                      </a:pPr>
+                      <a:r>
+                        <a:rPr lang="es-ES" sz="900">
                           <a:effectLst/>
                           <a:latin typeface="Times New Roman" panose="02020603050405020304" pitchFamily="18" charset="0"/>
                           <a:ea typeface="Times New Roman" panose="02020603050405020304" pitchFamily="18" charset="0"/>
                           <a:cs typeface="Times New Roman" panose="02020603050405020304" pitchFamily="18" charset="0"/>
                         </a:rPr>
-                        <a:t>103.06</a:t>
-                      </a:r>
-                    </a:p>
-                  </a:txBody>
-                  <a:tcPr marL="68580" marR="68580" marT="0" marB="0" anchor="ctr">
-                    <a:noFill/>
-                  </a:tcPr>
-                </a:tc>
-                <a:tc>
-                  <a:txBody>
-                    <a:bodyPr/>
-                    <a:lstStyle/>
-                    <a:p>
-                      <a:pPr algn="ctr">
-                        <a:buNone/>
-                      </a:pPr>
-                      <a:r>
-                        <a:rPr lang="es-ES_tradnl" sz="900" dirty="0">
+                        <a:t>53.34</a:t>
+                      </a:r>
+                      <a:endParaRPr lang="de-DE" sz="900">
+                        <a:effectLst/>
+                        <a:latin typeface="Times New Roman" panose="02020603050405020304" pitchFamily="18" charset="0"/>
+                        <a:ea typeface="Times New Roman" panose="02020603050405020304" pitchFamily="18" charset="0"/>
+                        <a:cs typeface="Times New Roman" panose="02020603050405020304" pitchFamily="18" charset="0"/>
+                      </a:endParaRPr>
+                    </a:p>
+                  </a:txBody>
+                  <a:tcPr marL="68580" marR="68580" marT="0" marB="0">
+                    <a:noFill/>
+                  </a:tcPr>
+                </a:tc>
+                <a:tc>
+                  <a:txBody>
+                    <a:bodyPr/>
+                    <a:lstStyle/>
+                    <a:p>
+                      <a:pPr algn="ctr">
+                        <a:buNone/>
+                      </a:pPr>
+                      <a:r>
+                        <a:rPr lang="es-ES" sz="900">
                           <a:effectLst/>
                           <a:latin typeface="Times New Roman" panose="02020603050405020304" pitchFamily="18" charset="0"/>
                           <a:ea typeface="Times New Roman" panose="02020603050405020304" pitchFamily="18" charset="0"/>
                           <a:cs typeface="Times New Roman" panose="02020603050405020304" pitchFamily="18" charset="0"/>
                         </a:rPr>
-                        <a:t>20.68</a:t>
-                      </a:r>
-                    </a:p>
-                  </a:txBody>
-                  <a:tcPr marL="68580" marR="68580" marT="0" marB="0" anchor="ctr">
-                    <a:noFill/>
-                  </a:tcPr>
-                </a:tc>
-                <a:tc>
-                  <a:txBody>
-                    <a:bodyPr/>
-                    <a:lstStyle/>
-                    <a:p>
-                      <a:pPr algn="ctr">
-                        <a:buNone/>
-                      </a:pPr>
-                      <a:r>
-                        <a:rPr lang="es-ES_tradnl" sz="900" dirty="0">
+                        <a:t>16.11</a:t>
+                      </a:r>
+                      <a:endParaRPr lang="de-DE" sz="900">
+                        <a:effectLst/>
+                        <a:latin typeface="Times New Roman" panose="02020603050405020304" pitchFamily="18" charset="0"/>
+                        <a:ea typeface="Times New Roman" panose="02020603050405020304" pitchFamily="18" charset="0"/>
+                        <a:cs typeface="Times New Roman" panose="02020603050405020304" pitchFamily="18" charset="0"/>
+                      </a:endParaRPr>
+                    </a:p>
+                  </a:txBody>
+                  <a:tcPr marL="68580" marR="68580" marT="0" marB="0">
+                    <a:noFill/>
+                  </a:tcPr>
+                </a:tc>
+                <a:tc>
+                  <a:txBody>
+                    <a:bodyPr/>
+                    <a:lstStyle/>
+                    <a:p>
+                      <a:pPr algn="ctr">
+                        <a:buNone/>
+                      </a:pPr>
+                      <a:r>
+                        <a:rPr lang="es-ES" sz="900">
                           <a:effectLst/>
                           <a:latin typeface="Times New Roman" panose="02020603050405020304" pitchFamily="18" charset="0"/>
                           <a:ea typeface="Times New Roman" panose="02020603050405020304" pitchFamily="18" charset="0"/>
                           <a:cs typeface="Times New Roman" panose="02020603050405020304" pitchFamily="18" charset="0"/>
                         </a:rPr>
-                        <a:t>24.50</a:t>
-                      </a:r>
-                    </a:p>
-                  </a:txBody>
-                  <a:tcPr marL="68580" marR="68580" marT="0" marB="0" anchor="ctr">
+                        <a:t>38.54</a:t>
+                      </a:r>
+                      <a:endParaRPr lang="de-DE" sz="900">
+                        <a:effectLst/>
+                        <a:latin typeface="Times New Roman" panose="02020603050405020304" pitchFamily="18" charset="0"/>
+                        <a:ea typeface="Times New Roman" panose="02020603050405020304" pitchFamily="18" charset="0"/>
+                        <a:cs typeface="Times New Roman" panose="02020603050405020304" pitchFamily="18" charset="0"/>
+                      </a:endParaRPr>
+                    </a:p>
+                  </a:txBody>
+                  <a:tcPr marL="68580" marR="68580" marT="0" marB="0">
                     <a:noFill/>
                   </a:tcPr>
                 </a:tc>
@@ -6761,109 +6831,139 @@
                         <a:buNone/>
                       </a:pPr>
                       <a:r>
-                        <a:rPr lang="es-ES_tradnl" sz="900" dirty="0">
+                        <a:rPr lang="es-ES" sz="900">
                           <a:effectLst/>
                           <a:latin typeface="Times New Roman" panose="02020603050405020304" pitchFamily="18" charset="0"/>
                           <a:ea typeface="Times New Roman" panose="02020603050405020304" pitchFamily="18" charset="0"/>
                           <a:cs typeface="Times New Roman" panose="02020603050405020304" pitchFamily="18" charset="0"/>
                         </a:rPr>
-                        <a:t>10.00</a:t>
-                      </a:r>
-                    </a:p>
-                  </a:txBody>
-                  <a:tcPr marL="68580" marR="68580" marT="0" marB="0" anchor="ctr">
-                    <a:noFill/>
-                  </a:tcPr>
-                </a:tc>
-                <a:tc>
-                  <a:txBody>
-                    <a:bodyPr/>
-                    <a:lstStyle/>
-                    <a:p>
-                      <a:pPr algn="ctr">
-                        <a:buNone/>
-                      </a:pPr>
-                      <a:r>
-                        <a:rPr lang="es-ES_tradnl" sz="900" dirty="0">
+                        <a:t>3.43</a:t>
+                      </a:r>
+                      <a:endParaRPr lang="de-DE" sz="900">
+                        <a:effectLst/>
+                        <a:latin typeface="Times New Roman" panose="02020603050405020304" pitchFamily="18" charset="0"/>
+                        <a:ea typeface="Times New Roman" panose="02020603050405020304" pitchFamily="18" charset="0"/>
+                        <a:cs typeface="Times New Roman" panose="02020603050405020304" pitchFamily="18" charset="0"/>
+                      </a:endParaRPr>
+                    </a:p>
+                  </a:txBody>
+                  <a:tcPr marL="68580" marR="68580" marT="0" marB="0">
+                    <a:noFill/>
+                  </a:tcPr>
+                </a:tc>
+                <a:tc>
+                  <a:txBody>
+                    <a:bodyPr/>
+                    <a:lstStyle/>
+                    <a:p>
+                      <a:pPr algn="ctr">
+                        <a:buNone/>
+                      </a:pPr>
+                      <a:r>
+                        <a:rPr lang="es-ES" sz="900">
                           <a:effectLst/>
                           <a:latin typeface="Times New Roman" panose="02020603050405020304" pitchFamily="18" charset="0"/>
                           <a:ea typeface="Times New Roman" panose="02020603050405020304" pitchFamily="18" charset="0"/>
                           <a:cs typeface="Times New Roman" panose="02020603050405020304" pitchFamily="18" charset="0"/>
                         </a:rPr>
-                        <a:t>5.26</a:t>
-                      </a:r>
-                    </a:p>
-                  </a:txBody>
-                  <a:tcPr marL="68580" marR="68580" marT="0" marB="0" anchor="ctr">
-                    <a:noFill/>
-                  </a:tcPr>
-                </a:tc>
-                <a:tc>
-                  <a:txBody>
-                    <a:bodyPr/>
-                    <a:lstStyle/>
-                    <a:p>
-                      <a:pPr algn="ctr">
-                        <a:buNone/>
-                      </a:pPr>
-                      <a:r>
-                        <a:rPr lang="es-ES_tradnl" sz="900" dirty="0">
+                        <a:t>68.80</a:t>
+                      </a:r>
+                      <a:endParaRPr lang="de-DE" sz="900">
+                        <a:effectLst/>
+                        <a:latin typeface="Times New Roman" panose="02020603050405020304" pitchFamily="18" charset="0"/>
+                        <a:ea typeface="Times New Roman" panose="02020603050405020304" pitchFamily="18" charset="0"/>
+                        <a:cs typeface="Times New Roman" panose="02020603050405020304" pitchFamily="18" charset="0"/>
+                      </a:endParaRPr>
+                    </a:p>
+                  </a:txBody>
+                  <a:tcPr marL="68580" marR="68580" marT="0" marB="0">
+                    <a:noFill/>
+                  </a:tcPr>
+                </a:tc>
+                <a:tc>
+                  <a:txBody>
+                    <a:bodyPr/>
+                    <a:lstStyle/>
+                    <a:p>
+                      <a:pPr algn="ctr">
+                        <a:buNone/>
+                      </a:pPr>
+                      <a:r>
+                        <a:rPr lang="es-ES" sz="900">
                           <a:effectLst/>
                           <a:latin typeface="Times New Roman" panose="02020603050405020304" pitchFamily="18" charset="0"/>
                           <a:ea typeface="Times New Roman" panose="02020603050405020304" pitchFamily="18" charset="0"/>
                           <a:cs typeface="Times New Roman" panose="02020603050405020304" pitchFamily="18" charset="0"/>
                         </a:rPr>
-                        <a:t>156.81</a:t>
-                      </a:r>
-                    </a:p>
-                  </a:txBody>
-                  <a:tcPr marL="68580" marR="68580" marT="0" marB="0" anchor="ctr">
-                    <a:noFill/>
-                  </a:tcPr>
-                </a:tc>
-                <a:tc>
-                  <a:txBody>
-                    <a:bodyPr/>
-                    <a:lstStyle/>
-                    <a:p>
-                      <a:pPr algn="ctr">
-                        <a:buNone/>
-                      </a:pPr>
-                      <a:r>
-                        <a:rPr lang="es-ES_tradnl" sz="900" dirty="0">
+                        <a:t>18.25</a:t>
+                      </a:r>
+                      <a:endParaRPr lang="de-DE" sz="900">
+                        <a:effectLst/>
+                        <a:latin typeface="Times New Roman" panose="02020603050405020304" pitchFamily="18" charset="0"/>
+                        <a:ea typeface="Times New Roman" panose="02020603050405020304" pitchFamily="18" charset="0"/>
+                        <a:cs typeface="Times New Roman" panose="02020603050405020304" pitchFamily="18" charset="0"/>
+                      </a:endParaRPr>
+                    </a:p>
+                  </a:txBody>
+                  <a:tcPr marL="68580" marR="68580" marT="0" marB="0">
+                    <a:noFill/>
+                  </a:tcPr>
+                </a:tc>
+                <a:tc>
+                  <a:txBody>
+                    <a:bodyPr/>
+                    <a:lstStyle/>
+                    <a:p>
+                      <a:pPr algn="ctr">
+                        <a:buNone/>
+                      </a:pPr>
+                      <a:r>
+                        <a:rPr lang="es-ES" sz="900">
                           <a:effectLst/>
                           <a:latin typeface="Times New Roman" panose="02020603050405020304" pitchFamily="18" charset="0"/>
                           <a:ea typeface="Times New Roman" panose="02020603050405020304" pitchFamily="18" charset="0"/>
                           <a:cs typeface="Times New Roman" panose="02020603050405020304" pitchFamily="18" charset="0"/>
                         </a:rPr>
-                        <a:t>24.81</a:t>
-                      </a:r>
-                    </a:p>
-                  </a:txBody>
-                  <a:tcPr marL="68580" marR="68580" marT="0" marB="0" anchor="ctr">
-                    <a:noFill/>
-                  </a:tcPr>
-                </a:tc>
-                <a:tc>
-                  <a:txBody>
-                    <a:bodyPr/>
-                    <a:lstStyle/>
-                    <a:p>
-                      <a:pPr algn="ctr">
-                        <a:buNone/>
-                      </a:pPr>
-                      <a:r>
-                        <a:rPr lang="es-ES_tradnl" sz="900" dirty="0">
+                        <a:t>29.38</a:t>
+                      </a:r>
+                      <a:endParaRPr lang="de-DE" sz="900">
+                        <a:effectLst/>
+                        <a:latin typeface="Times New Roman" panose="02020603050405020304" pitchFamily="18" charset="0"/>
+                        <a:ea typeface="Times New Roman" panose="02020603050405020304" pitchFamily="18" charset="0"/>
+                        <a:cs typeface="Times New Roman" panose="02020603050405020304" pitchFamily="18" charset="0"/>
+                      </a:endParaRPr>
+                    </a:p>
+                  </a:txBody>
+                  <a:tcPr marL="68580" marR="68580" marT="0" marB="0">
+                    <a:noFill/>
+                  </a:tcPr>
+                </a:tc>
+                <a:tc>
+                  <a:txBody>
+                    <a:bodyPr/>
+                    <a:lstStyle/>
+                    <a:p>
+                      <a:pPr algn="ctr">
+                        <a:buNone/>
+                      </a:pPr>
+                      <a:r>
+                        <a:rPr lang="es-ES" sz="900" dirty="0">
                           <a:effectLst/>
                           <a:latin typeface="Times New Roman" panose="02020603050405020304" pitchFamily="18" charset="0"/>
                           <a:ea typeface="Times New Roman" panose="02020603050405020304" pitchFamily="18" charset="0"/>
                           <a:cs typeface="Times New Roman" panose="02020603050405020304" pitchFamily="18" charset="0"/>
                         </a:rPr>
-                        <a:t>56.90</a:t>
-                      </a:r>
-                    </a:p>
-                  </a:txBody>
-                  <a:tcPr marL="68580" marR="68580" marT="0" marB="0" anchor="ctr">
+                        <a:t>NaN</a:t>
+                      </a:r>
+                      <a:endParaRPr lang="de-DE" sz="900" dirty="0">
+                        <a:effectLst/>
+                        <a:latin typeface="Times New Roman" panose="02020603050405020304" pitchFamily="18" charset="0"/>
+                        <a:ea typeface="Times New Roman" panose="02020603050405020304" pitchFamily="18" charset="0"/>
+                        <a:cs typeface="Times New Roman" panose="02020603050405020304" pitchFamily="18" charset="0"/>
+                      </a:endParaRPr>
+                    </a:p>
+                  </a:txBody>
+                  <a:tcPr marL="68580" marR="68580" marT="0" marB="0">
                     <a:noFill/>
                   </a:tcPr>
                 </a:tc>
@@ -8085,38 +8185,6 @@
           </a:p>
         </p:txBody>
       </p:sp>
-      <p:pic>
-        <p:nvPicPr>
-          <p:cNvPr id="5" name="Onlinebild-Platzhalter 4">
-            <a:extLst>
-              <a:ext uri="{FF2B5EF4-FFF2-40B4-BE49-F238E27FC236}">
-                <a16:creationId xmlns:a16="http://schemas.microsoft.com/office/drawing/2014/main" id="{2B0FE8C2-6F5E-FB14-284C-D807D93B667A}"/>
-              </a:ext>
-            </a:extLst>
-          </p:cNvPr>
-          <p:cNvPicPr>
-            <a:picLocks noGrp="1" noChangeAspect="1"/>
-          </p:cNvPicPr>
-          <p:nvPr>
-            <p:ph type="clipArt" sz="quarter" idx="15"/>
-          </p:nvPr>
-        </p:nvPicPr>
-        <p:blipFill>
-          <a:blip r:embed="rId2"/>
-          <a:stretch>
-            <a:fillRect/>
-          </a:stretch>
-        </p:blipFill>
-        <p:spPr>
-          <a:xfrm>
-            <a:off x="583920" y="2151063"/>
-            <a:ext cx="5239310" cy="4008437"/>
-          </a:xfrm>
-          <a:prstGeom prst="rect">
-            <a:avLst/>
-          </a:prstGeom>
-        </p:spPr>
-      </p:pic>
       <p:sp>
         <p:nvSpPr>
           <p:cNvPr id="2" name="Fußzeilenplatzhalter 2">
@@ -8246,6 +8314,38 @@
           </a:p>
         </p:txBody>
       </p:sp>
+      <p:pic>
+        <p:nvPicPr>
+          <p:cNvPr id="7" name="Onlinebild-Platzhalter 6">
+            <a:extLst>
+              <a:ext uri="{FF2B5EF4-FFF2-40B4-BE49-F238E27FC236}">
+                <a16:creationId xmlns:a16="http://schemas.microsoft.com/office/drawing/2014/main" id="{E0A7FC73-1091-DBA6-1884-C955EB1BC6C0}"/>
+              </a:ext>
+            </a:extLst>
+          </p:cNvPr>
+          <p:cNvPicPr>
+            <a:picLocks noGrp="1" noChangeAspect="1"/>
+          </p:cNvPicPr>
+          <p:nvPr>
+            <p:ph type="clipArt" sz="quarter" idx="15"/>
+          </p:nvPr>
+        </p:nvPicPr>
+        <p:blipFill>
+          <a:blip r:embed="rId2"/>
+          <a:stretch>
+            <a:fillRect/>
+          </a:stretch>
+        </p:blipFill>
+        <p:spPr>
+          <a:xfrm>
+            <a:off x="520700" y="2231013"/>
+            <a:ext cx="5365750" cy="3848537"/>
+          </a:xfrm>
+          <a:prstGeom prst="rect">
+            <a:avLst/>
+          </a:prstGeom>
+        </p:spPr>
+      </p:pic>
     </p:spTree>
     <p:extLst>
       <p:ext uri="{BB962C8B-B14F-4D97-AF65-F5344CB8AC3E}">
@@ -8334,6 +8434,11 @@
           </p:cNvGraphicFramePr>
           <p:nvPr>
             <p:ph sz="quarter" idx="14"/>
+            <p:extLst>
+              <p:ext uri="{D42A27DB-BD31-4B8C-83A1-F6EECF244321}">
+                <p14:modId xmlns:p14="http://schemas.microsoft.com/office/powerpoint/2010/main" val="405021749"/>
+              </p:ext>
+            </p:extLst>
           </p:nvPr>
         </p:nvGraphicFramePr>
         <p:xfrm>
@@ -9681,17 +9786,23 @@
                         <a:buNone/>
                       </a:pPr>
                       <a:r>
-                        <a:rPr lang="es-ES_tradnl" sz="900" dirty="0">
+                        <a:rPr lang="es-ES" sz="900">
                           <a:effectLst/>
                           <a:latin typeface="Times New Roman" panose="02020603050405020304" pitchFamily="18" charset="0"/>
                           <a:ea typeface="Times New Roman" panose="02020603050405020304" pitchFamily="18" charset="0"/>
                           <a:cs typeface="Times New Roman" panose="02020603050405020304" pitchFamily="18" charset="0"/>
                         </a:rPr>
-                        <a:t>3.70</a:t>
-                      </a:r>
-                    </a:p>
-                  </a:txBody>
-                  <a:tcPr marL="68580" marR="68580" marT="0" marB="0" anchor="ctr">
+                        <a:t>2.68</a:t>
+                      </a:r>
+                      <a:endParaRPr lang="de-DE" sz="900">
+                        <a:effectLst/>
+                        <a:latin typeface="Times New Roman" panose="02020603050405020304" pitchFamily="18" charset="0"/>
+                        <a:ea typeface="Times New Roman" panose="02020603050405020304" pitchFamily="18" charset="0"/>
+                        <a:cs typeface="Times New Roman" panose="02020603050405020304" pitchFamily="18" charset="0"/>
+                      </a:endParaRPr>
+                    </a:p>
+                  </a:txBody>
+                  <a:tcPr marL="68580" marR="68580" marT="0" marB="0">
                     <a:lnT w="12700" cap="flat" cmpd="sng" algn="ctr">
                       <a:solidFill>
                         <a:schemeClr val="tx1"/>
@@ -9713,17 +9824,23 @@
                         <a:buNone/>
                       </a:pPr>
                       <a:r>
-                        <a:rPr lang="es-ES_tradnl" sz="900" dirty="0">
+                        <a:rPr lang="es-ES" sz="900">
                           <a:effectLst/>
                           <a:latin typeface="Times New Roman" panose="02020603050405020304" pitchFamily="18" charset="0"/>
                           <a:ea typeface="Times New Roman" panose="02020603050405020304" pitchFamily="18" charset="0"/>
                           <a:cs typeface="Times New Roman" panose="02020603050405020304" pitchFamily="18" charset="0"/>
                         </a:rPr>
-                        <a:t>75.09</a:t>
-                      </a:r>
-                    </a:p>
-                  </a:txBody>
-                  <a:tcPr marL="68580" marR="68580" marT="0" marB="0" anchor="ctr">
+                        <a:t>41.06</a:t>
+                      </a:r>
+                      <a:endParaRPr lang="de-DE" sz="900">
+                        <a:effectLst/>
+                        <a:latin typeface="Times New Roman" panose="02020603050405020304" pitchFamily="18" charset="0"/>
+                        <a:ea typeface="Times New Roman" panose="02020603050405020304" pitchFamily="18" charset="0"/>
+                        <a:cs typeface="Times New Roman" panose="02020603050405020304" pitchFamily="18" charset="0"/>
+                      </a:endParaRPr>
+                    </a:p>
+                  </a:txBody>
+                  <a:tcPr marL="68580" marR="68580" marT="0" marB="0">
                     <a:lnT w="12700" cap="flat" cmpd="sng" algn="ctr">
                       <a:solidFill>
                         <a:schemeClr val="tx1"/>
@@ -9745,17 +9862,23 @@
                         <a:buNone/>
                       </a:pPr>
                       <a:r>
-                        <a:rPr lang="es-ES_tradnl" sz="900" dirty="0">
+                        <a:rPr lang="es-ES" sz="900">
                           <a:effectLst/>
                           <a:latin typeface="Times New Roman" panose="02020603050405020304" pitchFamily="18" charset="0"/>
                           <a:ea typeface="Times New Roman" panose="02020603050405020304" pitchFamily="18" charset="0"/>
                           <a:cs typeface="Times New Roman" panose="02020603050405020304" pitchFamily="18" charset="0"/>
                         </a:rPr>
-                        <a:t>18.45</a:t>
-                      </a:r>
-                    </a:p>
-                  </a:txBody>
-                  <a:tcPr marL="68580" marR="68580" marT="0" marB="0" anchor="ctr">
+                        <a:t>14.84</a:t>
+                      </a:r>
+                      <a:endParaRPr lang="de-DE" sz="900">
+                        <a:effectLst/>
+                        <a:latin typeface="Times New Roman" panose="02020603050405020304" pitchFamily="18" charset="0"/>
+                        <a:ea typeface="Times New Roman" panose="02020603050405020304" pitchFamily="18" charset="0"/>
+                        <a:cs typeface="Times New Roman" panose="02020603050405020304" pitchFamily="18" charset="0"/>
+                      </a:endParaRPr>
+                    </a:p>
+                  </a:txBody>
+                  <a:tcPr marL="68580" marR="68580" marT="0" marB="0">
                     <a:lnT w="12700" cap="flat" cmpd="sng" algn="ctr">
                       <a:solidFill>
                         <a:schemeClr val="tx1"/>
@@ -9777,17 +9900,23 @@
                         <a:buNone/>
                       </a:pPr>
                       <a:r>
-                        <a:rPr lang="es-ES_tradnl" sz="900" dirty="0">
+                        <a:rPr lang="es-ES" sz="900">
                           <a:effectLst/>
                           <a:latin typeface="Times New Roman" panose="02020603050405020304" pitchFamily="18" charset="0"/>
                           <a:ea typeface="Times New Roman" panose="02020603050405020304" pitchFamily="18" charset="0"/>
                           <a:cs typeface="Times New Roman" panose="02020603050405020304" pitchFamily="18" charset="0"/>
                         </a:rPr>
-                        <a:t>57.05</a:t>
-                      </a:r>
-                    </a:p>
-                  </a:txBody>
-                  <a:tcPr marL="68580" marR="68580" marT="0" marB="0" anchor="ctr">
+                        <a:t>30.93</a:t>
+                      </a:r>
+                      <a:endParaRPr lang="de-DE" sz="900">
+                        <a:effectLst/>
+                        <a:latin typeface="Times New Roman" panose="02020603050405020304" pitchFamily="18" charset="0"/>
+                        <a:ea typeface="Times New Roman" panose="02020603050405020304" pitchFamily="18" charset="0"/>
+                        <a:cs typeface="Times New Roman" panose="02020603050405020304" pitchFamily="18" charset="0"/>
+                      </a:endParaRPr>
+                    </a:p>
+                  </a:txBody>
+                  <a:tcPr marL="68580" marR="68580" marT="0" marB="0">
                     <a:lnT w="12700" cap="flat" cmpd="sng" algn="ctr">
                       <a:solidFill>
                         <a:schemeClr val="tx1"/>
@@ -9809,7 +9938,7 @@
                         <a:buNone/>
                       </a:pPr>
                       <a:r>
-                        <a:rPr lang="es-ES_tradnl" sz="900" dirty="0">
+                        <a:rPr lang="es-ES" sz="900">
                           <a:effectLst/>
                           <a:latin typeface="Times New Roman" panose="02020603050405020304" pitchFamily="18" charset="0"/>
                           <a:ea typeface="Times New Roman" panose="02020603050405020304" pitchFamily="18" charset="0"/>
@@ -9817,9 +9946,15 @@
                         </a:rPr>
                         <a:t>NaN</a:t>
                       </a:r>
-                    </a:p>
-                  </a:txBody>
-                  <a:tcPr marL="68580" marR="68580" marT="0" marB="0" anchor="ctr">
+                      <a:endParaRPr lang="de-DE" sz="900">
+                        <a:effectLst/>
+                        <a:latin typeface="Times New Roman" panose="02020603050405020304" pitchFamily="18" charset="0"/>
+                        <a:ea typeface="Times New Roman" panose="02020603050405020304" pitchFamily="18" charset="0"/>
+                        <a:cs typeface="Times New Roman" panose="02020603050405020304" pitchFamily="18" charset="0"/>
+                      </a:endParaRPr>
+                    </a:p>
+                  </a:txBody>
+                  <a:tcPr marL="68580" marR="68580" marT="0" marB="0">
                     <a:lnT w="12700" cap="flat" cmpd="sng" algn="ctr">
                       <a:solidFill>
                         <a:schemeClr val="tx1"/>
@@ -10104,109 +10239,139 @@
                         <a:buNone/>
                       </a:pPr>
                       <a:r>
-                        <a:rPr lang="es-ES_tradnl" sz="900" dirty="0">
+                        <a:rPr lang="es-ES" sz="900">
                           <a:effectLst/>
                           <a:latin typeface="Times New Roman" panose="02020603050405020304" pitchFamily="18" charset="0"/>
                           <a:ea typeface="Times New Roman" panose="02020603050405020304" pitchFamily="18" charset="0"/>
                           <a:cs typeface="Times New Roman" panose="02020603050405020304" pitchFamily="18" charset="0"/>
                         </a:rPr>
-                        <a:t>9.99</a:t>
-                      </a:r>
-                    </a:p>
-                  </a:txBody>
-                  <a:tcPr marL="68580" marR="68580" marT="0" marB="0" anchor="ctr">
-                    <a:noFill/>
-                  </a:tcPr>
-                </a:tc>
-                <a:tc>
-                  <a:txBody>
-                    <a:bodyPr/>
-                    <a:lstStyle/>
-                    <a:p>
-                      <a:pPr algn="ctr">
-                        <a:buNone/>
-                      </a:pPr>
-                      <a:r>
-                        <a:rPr lang="es-ES_tradnl" sz="900" dirty="0">
+                        <a:t>2.74</a:t>
+                      </a:r>
+                      <a:endParaRPr lang="de-DE" sz="900">
+                        <a:effectLst/>
+                        <a:latin typeface="Times New Roman" panose="02020603050405020304" pitchFamily="18" charset="0"/>
+                        <a:ea typeface="Times New Roman" panose="02020603050405020304" pitchFamily="18" charset="0"/>
+                        <a:cs typeface="Times New Roman" panose="02020603050405020304" pitchFamily="18" charset="0"/>
+                      </a:endParaRPr>
+                    </a:p>
+                  </a:txBody>
+                  <a:tcPr marL="68580" marR="68580" marT="0" marB="0">
+                    <a:noFill/>
+                  </a:tcPr>
+                </a:tc>
+                <a:tc>
+                  <a:txBody>
+                    <a:bodyPr/>
+                    <a:lstStyle/>
+                    <a:p>
+                      <a:pPr algn="ctr">
+                        <a:buNone/>
+                      </a:pPr>
+                      <a:r>
+                        <a:rPr lang="es-ES" sz="900">
                           <a:effectLst/>
                           <a:latin typeface="Times New Roman" panose="02020603050405020304" pitchFamily="18" charset="0"/>
                           <a:ea typeface="Times New Roman" panose="02020603050405020304" pitchFamily="18" charset="0"/>
                           <a:cs typeface="Times New Roman" panose="02020603050405020304" pitchFamily="18" charset="0"/>
                         </a:rPr>
-                        <a:t>3.89</a:t>
-                      </a:r>
-                    </a:p>
-                  </a:txBody>
-                  <a:tcPr marL="68580" marR="68580" marT="0" marB="0" anchor="ctr">
-                    <a:noFill/>
-                  </a:tcPr>
-                </a:tc>
-                <a:tc>
-                  <a:txBody>
-                    <a:bodyPr/>
-                    <a:lstStyle/>
-                    <a:p>
-                      <a:pPr algn="ctr">
-                        <a:buNone/>
-                      </a:pPr>
-                      <a:r>
-                        <a:rPr lang="es-ES_tradnl" sz="900" dirty="0">
+                        <a:t>43.07</a:t>
+                      </a:r>
+                      <a:endParaRPr lang="de-DE" sz="900">
+                        <a:effectLst/>
+                        <a:latin typeface="Times New Roman" panose="02020603050405020304" pitchFamily="18" charset="0"/>
+                        <a:ea typeface="Times New Roman" panose="02020603050405020304" pitchFamily="18" charset="0"/>
+                        <a:cs typeface="Times New Roman" panose="02020603050405020304" pitchFamily="18" charset="0"/>
+                      </a:endParaRPr>
+                    </a:p>
+                  </a:txBody>
+                  <a:tcPr marL="68580" marR="68580" marT="0" marB="0">
+                    <a:noFill/>
+                  </a:tcPr>
+                </a:tc>
+                <a:tc>
+                  <a:txBody>
+                    <a:bodyPr/>
+                    <a:lstStyle/>
+                    <a:p>
+                      <a:pPr algn="ctr">
+                        <a:buNone/>
+                      </a:pPr>
+                      <a:r>
+                        <a:rPr lang="es-ES" sz="900">
                           <a:effectLst/>
                           <a:latin typeface="Times New Roman" panose="02020603050405020304" pitchFamily="18" charset="0"/>
                           <a:ea typeface="Times New Roman" panose="02020603050405020304" pitchFamily="18" charset="0"/>
                           <a:cs typeface="Times New Roman" panose="02020603050405020304" pitchFamily="18" charset="0"/>
                         </a:rPr>
-                        <a:t>83.37</a:t>
-                      </a:r>
-                    </a:p>
-                  </a:txBody>
-                  <a:tcPr marL="68580" marR="68580" marT="0" marB="0" anchor="ctr">
-                    <a:noFill/>
-                  </a:tcPr>
-                </a:tc>
-                <a:tc>
-                  <a:txBody>
-                    <a:bodyPr/>
-                    <a:lstStyle/>
-                    <a:p>
-                      <a:pPr algn="ctr">
-                        <a:buNone/>
-                      </a:pPr>
-                      <a:r>
-                        <a:rPr lang="es-ES_tradnl" sz="900" dirty="0">
+                        <a:t>15.06</a:t>
+                      </a:r>
+                      <a:endParaRPr lang="de-DE" sz="900">
+                        <a:effectLst/>
+                        <a:latin typeface="Times New Roman" panose="02020603050405020304" pitchFamily="18" charset="0"/>
+                        <a:ea typeface="Times New Roman" panose="02020603050405020304" pitchFamily="18" charset="0"/>
+                        <a:cs typeface="Times New Roman" panose="02020603050405020304" pitchFamily="18" charset="0"/>
+                      </a:endParaRPr>
+                    </a:p>
+                  </a:txBody>
+                  <a:tcPr marL="68580" marR="68580" marT="0" marB="0">
+                    <a:noFill/>
+                  </a:tcPr>
+                </a:tc>
+                <a:tc>
+                  <a:txBody>
+                    <a:bodyPr/>
+                    <a:lstStyle/>
+                    <a:p>
+                      <a:pPr algn="ctr">
+                        <a:buNone/>
+                      </a:pPr>
+                      <a:r>
+                        <a:rPr lang="es-ES" sz="900">
                           <a:effectLst/>
                           <a:latin typeface="Times New Roman" panose="02020603050405020304" pitchFamily="18" charset="0"/>
                           <a:ea typeface="Times New Roman" panose="02020603050405020304" pitchFamily="18" charset="0"/>
                           <a:cs typeface="Times New Roman" panose="02020603050405020304" pitchFamily="18" charset="0"/>
                         </a:rPr>
-                        <a:t>19.34</a:t>
-                      </a:r>
-                    </a:p>
-                  </a:txBody>
-                  <a:tcPr marL="68580" marR="68580" marT="0" marB="0" anchor="ctr">
-                    <a:noFill/>
-                  </a:tcPr>
-                </a:tc>
-                <a:tc>
-                  <a:txBody>
-                    <a:bodyPr/>
-                    <a:lstStyle/>
-                    <a:p>
-                      <a:pPr algn="ctr">
-                        <a:buNone/>
-                      </a:pPr>
-                      <a:r>
-                        <a:rPr lang="es-ES_tradnl" sz="900" dirty="0">
+                        <a:t>35.59</a:t>
+                      </a:r>
+                      <a:endParaRPr lang="de-DE" sz="900">
+                        <a:effectLst/>
+                        <a:latin typeface="Times New Roman" panose="02020603050405020304" pitchFamily="18" charset="0"/>
+                        <a:ea typeface="Times New Roman" panose="02020603050405020304" pitchFamily="18" charset="0"/>
+                        <a:cs typeface="Times New Roman" panose="02020603050405020304" pitchFamily="18" charset="0"/>
+                      </a:endParaRPr>
+                    </a:p>
+                  </a:txBody>
+                  <a:tcPr marL="68580" marR="68580" marT="0" marB="0">
+                    <a:noFill/>
+                  </a:tcPr>
+                </a:tc>
+                <a:tc>
+                  <a:txBody>
+                    <a:bodyPr/>
+                    <a:lstStyle/>
+                    <a:p>
+                      <a:pPr algn="ctr">
+                        <a:buNone/>
+                      </a:pPr>
+                      <a:r>
+                        <a:rPr lang="es-ES" sz="900">
                           <a:effectLst/>
                           <a:latin typeface="Times New Roman" panose="02020603050405020304" pitchFamily="18" charset="0"/>
                           <a:ea typeface="Times New Roman" panose="02020603050405020304" pitchFamily="18" charset="0"/>
                           <a:cs typeface="Times New Roman" panose="02020603050405020304" pitchFamily="18" charset="0"/>
                         </a:rPr>
-                        <a:t>63.29</a:t>
-                      </a:r>
-                    </a:p>
-                  </a:txBody>
-                  <a:tcPr marL="68580" marR="68580" marT="0" marB="0" anchor="ctr">
+                        <a:t>NaN</a:t>
+                      </a:r>
+                      <a:endParaRPr lang="de-DE" sz="900">
+                        <a:effectLst/>
+                        <a:latin typeface="Times New Roman" panose="02020603050405020304" pitchFamily="18" charset="0"/>
+                        <a:ea typeface="Times New Roman" panose="02020603050405020304" pitchFamily="18" charset="0"/>
+                        <a:cs typeface="Times New Roman" panose="02020603050405020304" pitchFamily="18" charset="0"/>
+                      </a:endParaRPr>
+                    </a:p>
+                  </a:txBody>
+                  <a:tcPr marL="68580" marR="68580" marT="0" marB="0">
                     <a:noFill/>
                   </a:tcPr>
                 </a:tc>
@@ -10482,109 +10647,139 @@
                         <a:buNone/>
                       </a:pPr>
                       <a:r>
-                        <a:rPr lang="es-ES_tradnl" sz="900" dirty="0">
+                        <a:rPr lang="es-ES" sz="900">
                           <a:effectLst/>
                           <a:latin typeface="Times New Roman" panose="02020603050405020304" pitchFamily="18" charset="0"/>
                           <a:ea typeface="Times New Roman" panose="02020603050405020304" pitchFamily="18" charset="0"/>
                           <a:cs typeface="Times New Roman" panose="02020603050405020304" pitchFamily="18" charset="0"/>
                         </a:rPr>
-                        <a:t>9.99</a:t>
-                      </a:r>
-                    </a:p>
-                  </a:txBody>
-                  <a:tcPr marL="68580" marR="68580" marT="0" marB="0" anchor="ctr">
-                    <a:noFill/>
-                  </a:tcPr>
-                </a:tc>
-                <a:tc>
-                  <a:txBody>
-                    <a:bodyPr/>
-                    <a:lstStyle/>
-                    <a:p>
-                      <a:pPr algn="ctr">
-                        <a:buNone/>
-                      </a:pPr>
-                      <a:r>
-                        <a:rPr lang="es-ES_tradnl" sz="900" dirty="0">
+                        <a:t>2.82</a:t>
+                      </a:r>
+                      <a:endParaRPr lang="de-DE" sz="900">
+                        <a:effectLst/>
+                        <a:latin typeface="Times New Roman" panose="02020603050405020304" pitchFamily="18" charset="0"/>
+                        <a:ea typeface="Times New Roman" panose="02020603050405020304" pitchFamily="18" charset="0"/>
+                        <a:cs typeface="Times New Roman" panose="02020603050405020304" pitchFamily="18" charset="0"/>
+                      </a:endParaRPr>
+                    </a:p>
+                  </a:txBody>
+                  <a:tcPr marL="68580" marR="68580" marT="0" marB="0">
+                    <a:noFill/>
+                  </a:tcPr>
+                </a:tc>
+                <a:tc>
+                  <a:txBody>
+                    <a:bodyPr/>
+                    <a:lstStyle/>
+                    <a:p>
+                      <a:pPr algn="ctr">
+                        <a:buNone/>
+                      </a:pPr>
+                      <a:r>
+                        <a:rPr lang="es-ES" sz="900">
                           <a:effectLst/>
                           <a:latin typeface="Times New Roman" panose="02020603050405020304" pitchFamily="18" charset="0"/>
                           <a:ea typeface="Times New Roman" panose="02020603050405020304" pitchFamily="18" charset="0"/>
                           <a:cs typeface="Times New Roman" panose="02020603050405020304" pitchFamily="18" charset="0"/>
                         </a:rPr>
-                        <a:t>4.02</a:t>
-                      </a:r>
-                    </a:p>
-                  </a:txBody>
-                  <a:tcPr marL="68580" marR="68580" marT="0" marB="0" anchor="ctr">
-                    <a:noFill/>
-                  </a:tcPr>
-                </a:tc>
-                <a:tc>
-                  <a:txBody>
-                    <a:bodyPr/>
-                    <a:lstStyle/>
-                    <a:p>
-                      <a:pPr algn="ctr">
-                        <a:buNone/>
-                      </a:pPr>
-                      <a:r>
-                        <a:rPr lang="es-ES_tradnl" sz="900" dirty="0">
+                        <a:t>45.67</a:t>
+                      </a:r>
+                      <a:endParaRPr lang="de-DE" sz="900">
+                        <a:effectLst/>
+                        <a:latin typeface="Times New Roman" panose="02020603050405020304" pitchFamily="18" charset="0"/>
+                        <a:ea typeface="Times New Roman" panose="02020603050405020304" pitchFamily="18" charset="0"/>
+                        <a:cs typeface="Times New Roman" panose="02020603050405020304" pitchFamily="18" charset="0"/>
+                      </a:endParaRPr>
+                    </a:p>
+                  </a:txBody>
+                  <a:tcPr marL="68580" marR="68580" marT="0" marB="0">
+                    <a:noFill/>
+                  </a:tcPr>
+                </a:tc>
+                <a:tc>
+                  <a:txBody>
+                    <a:bodyPr/>
+                    <a:lstStyle/>
+                    <a:p>
+                      <a:pPr algn="ctr">
+                        <a:buNone/>
+                      </a:pPr>
+                      <a:r>
+                        <a:rPr lang="es-ES" sz="900">
                           <a:effectLst/>
                           <a:latin typeface="Times New Roman" panose="02020603050405020304" pitchFamily="18" charset="0"/>
                           <a:ea typeface="Times New Roman" panose="02020603050405020304" pitchFamily="18" charset="0"/>
                           <a:cs typeface="Times New Roman" panose="02020603050405020304" pitchFamily="18" charset="0"/>
                         </a:rPr>
-                        <a:t>89.94</a:t>
-                      </a:r>
-                    </a:p>
-                  </a:txBody>
-                  <a:tcPr marL="68580" marR="68580" marT="0" marB="0" anchor="ctr">
-                    <a:noFill/>
-                  </a:tcPr>
-                </a:tc>
-                <a:tc>
-                  <a:txBody>
-                    <a:bodyPr/>
-                    <a:lstStyle/>
-                    <a:p>
-                      <a:pPr algn="ctr">
-                        <a:buNone/>
-                      </a:pPr>
-                      <a:r>
-                        <a:rPr lang="es-ES_tradnl" sz="900" dirty="0">
+                        <a:t>15.29</a:t>
+                      </a:r>
+                      <a:endParaRPr lang="de-DE" sz="900">
+                        <a:effectLst/>
+                        <a:latin typeface="Times New Roman" panose="02020603050405020304" pitchFamily="18" charset="0"/>
+                        <a:ea typeface="Times New Roman" panose="02020603050405020304" pitchFamily="18" charset="0"/>
+                        <a:cs typeface="Times New Roman" panose="02020603050405020304" pitchFamily="18" charset="0"/>
+                      </a:endParaRPr>
+                    </a:p>
+                  </a:txBody>
+                  <a:tcPr marL="68580" marR="68580" marT="0" marB="0">
+                    <a:noFill/>
+                  </a:tcPr>
+                </a:tc>
+                <a:tc>
+                  <a:txBody>
+                    <a:bodyPr/>
+                    <a:lstStyle/>
+                    <a:p>
+                      <a:pPr algn="ctr">
+                        <a:buNone/>
+                      </a:pPr>
+                      <a:r>
+                        <a:rPr lang="es-ES" sz="900">
                           <a:effectLst/>
                           <a:latin typeface="Times New Roman" panose="02020603050405020304" pitchFamily="18" charset="0"/>
                           <a:ea typeface="Times New Roman" panose="02020603050405020304" pitchFamily="18" charset="0"/>
                           <a:cs typeface="Times New Roman" panose="02020603050405020304" pitchFamily="18" charset="0"/>
                         </a:rPr>
-                        <a:t>19.79</a:t>
-                      </a:r>
-                    </a:p>
-                  </a:txBody>
-                  <a:tcPr marL="68580" marR="68580" marT="0" marB="0" anchor="ctr">
-                    <a:noFill/>
-                  </a:tcPr>
-                </a:tc>
-                <a:tc>
-                  <a:txBody>
-                    <a:bodyPr/>
-                    <a:lstStyle/>
-                    <a:p>
-                      <a:pPr algn="ctr">
-                        <a:buNone/>
-                      </a:pPr>
-                      <a:r>
-                        <a:rPr lang="es-ES_tradnl" sz="900" dirty="0">
+                        <a:t>44.09</a:t>
+                      </a:r>
+                      <a:endParaRPr lang="de-DE" sz="900">
+                        <a:effectLst/>
+                        <a:latin typeface="Times New Roman" panose="02020603050405020304" pitchFamily="18" charset="0"/>
+                        <a:ea typeface="Times New Roman" panose="02020603050405020304" pitchFamily="18" charset="0"/>
+                        <a:cs typeface="Times New Roman" panose="02020603050405020304" pitchFamily="18" charset="0"/>
+                      </a:endParaRPr>
+                    </a:p>
+                  </a:txBody>
+                  <a:tcPr marL="68580" marR="68580" marT="0" marB="0">
+                    <a:noFill/>
+                  </a:tcPr>
+                </a:tc>
+                <a:tc>
+                  <a:txBody>
+                    <a:bodyPr/>
+                    <a:lstStyle/>
+                    <a:p>
+                      <a:pPr algn="ctr">
+                        <a:buNone/>
+                      </a:pPr>
+                      <a:r>
+                        <a:rPr lang="es-ES" sz="900" dirty="0">
                           <a:effectLst/>
                           <a:latin typeface="Times New Roman" panose="02020603050405020304" pitchFamily="18" charset="0"/>
                           <a:ea typeface="Times New Roman" panose="02020603050405020304" pitchFamily="18" charset="0"/>
                           <a:cs typeface="Times New Roman" panose="02020603050405020304" pitchFamily="18" charset="0"/>
                         </a:rPr>
-                        <a:t>72.91</a:t>
-                      </a:r>
-                    </a:p>
-                  </a:txBody>
-                  <a:tcPr marL="68580" marR="68580" marT="0" marB="0" anchor="ctr">
+                        <a:t>NaN</a:t>
+                      </a:r>
+                      <a:endParaRPr lang="de-DE" sz="900" dirty="0">
+                        <a:effectLst/>
+                        <a:latin typeface="Times New Roman" panose="02020603050405020304" pitchFamily="18" charset="0"/>
+                        <a:ea typeface="Times New Roman" panose="02020603050405020304" pitchFamily="18" charset="0"/>
+                        <a:cs typeface="Times New Roman" panose="02020603050405020304" pitchFamily="18" charset="0"/>
+                      </a:endParaRPr>
+                    </a:p>
+                  </a:txBody>
+                  <a:tcPr marL="68580" marR="68580" marT="0" marB="0">
                     <a:noFill/>
                   </a:tcPr>
                 </a:tc>
@@ -11780,38 +11975,6 @@
           </a:p>
         </p:txBody>
       </p:sp>
-      <p:pic>
-        <p:nvPicPr>
-          <p:cNvPr id="8" name="Onlinebild-Platzhalter 7">
-            <a:extLst>
-              <a:ext uri="{FF2B5EF4-FFF2-40B4-BE49-F238E27FC236}">
-                <a16:creationId xmlns:a16="http://schemas.microsoft.com/office/drawing/2014/main" id="{81FDDA56-317C-4A2A-F4AA-6C829AF044D6}"/>
-              </a:ext>
-            </a:extLst>
-          </p:cNvPr>
-          <p:cNvPicPr>
-            <a:picLocks noGrp="1" noChangeAspect="1"/>
-          </p:cNvPicPr>
-          <p:nvPr>
-            <p:ph type="clipArt" sz="quarter" idx="15"/>
-          </p:nvPr>
-        </p:nvPicPr>
-        <p:blipFill>
-          <a:blip r:embed="rId2"/>
-          <a:stretch>
-            <a:fillRect/>
-          </a:stretch>
-        </p:blipFill>
-        <p:spPr>
-          <a:xfrm>
-            <a:off x="583920" y="2151063"/>
-            <a:ext cx="5239310" cy="4008437"/>
-          </a:xfrm>
-          <a:prstGeom prst="rect">
-            <a:avLst/>
-          </a:prstGeom>
-        </p:spPr>
-      </p:pic>
       <p:sp>
         <p:nvSpPr>
           <p:cNvPr id="2" name="Fußzeilenplatzhalter 2">
@@ -11941,6 +12104,38 @@
           </a:p>
         </p:txBody>
       </p:sp>
+      <p:pic>
+        <p:nvPicPr>
+          <p:cNvPr id="7" name="Onlinebild-Platzhalter 6">
+            <a:extLst>
+              <a:ext uri="{FF2B5EF4-FFF2-40B4-BE49-F238E27FC236}">
+                <a16:creationId xmlns:a16="http://schemas.microsoft.com/office/drawing/2014/main" id="{5400D3B3-B51A-4D5B-F321-3353CD34DD9B}"/>
+              </a:ext>
+            </a:extLst>
+          </p:cNvPr>
+          <p:cNvPicPr>
+            <a:picLocks noGrp="1" noChangeAspect="1"/>
+          </p:cNvPicPr>
+          <p:nvPr>
+            <p:ph type="clipArt" sz="quarter" idx="15"/>
+          </p:nvPr>
+        </p:nvPicPr>
+        <p:blipFill>
+          <a:blip r:embed="rId2"/>
+          <a:stretch>
+            <a:fillRect/>
+          </a:stretch>
+        </p:blipFill>
+        <p:spPr>
+          <a:xfrm>
+            <a:off x="520700" y="2231013"/>
+            <a:ext cx="5365750" cy="3848537"/>
+          </a:xfrm>
+          <a:prstGeom prst="rect">
+            <a:avLst/>
+          </a:prstGeom>
+        </p:spPr>
+      </p:pic>
     </p:spTree>
     <p:extLst>
       <p:ext uri="{BB962C8B-B14F-4D97-AF65-F5344CB8AC3E}">
@@ -12029,6 +12224,11 @@
           </p:cNvGraphicFramePr>
           <p:nvPr>
             <p:ph sz="quarter" idx="14"/>
+            <p:extLst>
+              <p:ext uri="{D42A27DB-BD31-4B8C-83A1-F6EECF244321}">
+                <p14:modId xmlns:p14="http://schemas.microsoft.com/office/powerpoint/2010/main" val="1692264347"/>
+              </p:ext>
+            </p:extLst>
           </p:nvPr>
         </p:nvGraphicFramePr>
         <p:xfrm>
@@ -13376,17 +13576,23 @@
                         <a:buNone/>
                       </a:pPr>
                       <a:r>
-                        <a:rPr lang="es-ES_tradnl" sz="900" dirty="0">
+                        <a:rPr lang="es-ES" sz="900">
                           <a:effectLst/>
                           <a:latin typeface="Times New Roman" panose="02020603050405020304" pitchFamily="18" charset="0"/>
                           <a:ea typeface="Times New Roman" panose="02020603050405020304" pitchFamily="18" charset="0"/>
                           <a:cs typeface="Times New Roman" panose="02020603050405020304" pitchFamily="18" charset="0"/>
                         </a:rPr>
-                        <a:t>9.96</a:t>
-                      </a:r>
-                    </a:p>
-                  </a:txBody>
-                  <a:tcPr marL="68580" marR="68580" marT="0" marB="0" anchor="ctr">
+                        <a:t>2.55</a:t>
+                      </a:r>
+                      <a:endParaRPr lang="de-DE" sz="900">
+                        <a:effectLst/>
+                        <a:latin typeface="Times New Roman" panose="02020603050405020304" pitchFamily="18" charset="0"/>
+                        <a:ea typeface="Times New Roman" panose="02020603050405020304" pitchFamily="18" charset="0"/>
+                        <a:cs typeface="Times New Roman" panose="02020603050405020304" pitchFamily="18" charset="0"/>
+                      </a:endParaRPr>
+                    </a:p>
+                  </a:txBody>
+                  <a:tcPr marL="68580" marR="68580" marT="0" marB="0">
                     <a:lnT w="12700" cap="flat" cmpd="sng" algn="ctr">
                       <a:solidFill>
                         <a:schemeClr val="tx1"/>
@@ -13408,17 +13614,23 @@
                         <a:buNone/>
                       </a:pPr>
                       <a:r>
-                        <a:rPr lang="es-ES_tradnl" sz="900" dirty="0">
+                        <a:rPr lang="es-ES" sz="900">
                           <a:effectLst/>
                           <a:latin typeface="Times New Roman" panose="02020603050405020304" pitchFamily="18" charset="0"/>
                           <a:ea typeface="Times New Roman" panose="02020603050405020304" pitchFamily="18" charset="0"/>
                           <a:cs typeface="Times New Roman" panose="02020603050405020304" pitchFamily="18" charset="0"/>
                         </a:rPr>
-                        <a:t>3.47</a:t>
-                      </a:r>
-                    </a:p>
-                  </a:txBody>
-                  <a:tcPr marL="68580" marR="68580" marT="0" marB="0" anchor="ctr">
+                        <a:t>36.91</a:t>
+                      </a:r>
+                      <a:endParaRPr lang="de-DE" sz="900">
+                        <a:effectLst/>
+                        <a:latin typeface="Times New Roman" panose="02020603050405020304" pitchFamily="18" charset="0"/>
+                        <a:ea typeface="Times New Roman" panose="02020603050405020304" pitchFamily="18" charset="0"/>
+                        <a:cs typeface="Times New Roman" panose="02020603050405020304" pitchFamily="18" charset="0"/>
+                      </a:endParaRPr>
+                    </a:p>
+                  </a:txBody>
+                  <a:tcPr marL="68580" marR="68580" marT="0" marB="0">
                     <a:lnT w="12700" cap="flat" cmpd="sng" algn="ctr">
                       <a:solidFill>
                         <a:schemeClr val="tx1"/>
@@ -13440,17 +13652,23 @@
                         <a:buNone/>
                       </a:pPr>
                       <a:r>
-                        <a:rPr lang="es-ES_tradnl" sz="900" dirty="0">
+                        <a:rPr lang="es-ES" sz="900">
                           <a:effectLst/>
                           <a:latin typeface="Times New Roman" panose="02020603050405020304" pitchFamily="18" charset="0"/>
                           <a:ea typeface="Times New Roman" panose="02020603050405020304" pitchFamily="18" charset="0"/>
                           <a:cs typeface="Times New Roman" panose="02020603050405020304" pitchFamily="18" charset="0"/>
                         </a:rPr>
-                        <a:t>66.44</a:t>
-                      </a:r>
-                    </a:p>
-                  </a:txBody>
-                  <a:tcPr marL="68580" marR="68580" marT="0" marB="0" anchor="ctr">
+                        <a:t>14.35</a:t>
+                      </a:r>
+                      <a:endParaRPr lang="de-DE" sz="900">
+                        <a:effectLst/>
+                        <a:latin typeface="Times New Roman" panose="02020603050405020304" pitchFamily="18" charset="0"/>
+                        <a:ea typeface="Times New Roman" panose="02020603050405020304" pitchFamily="18" charset="0"/>
+                        <a:cs typeface="Times New Roman" panose="02020603050405020304" pitchFamily="18" charset="0"/>
+                      </a:endParaRPr>
+                    </a:p>
+                  </a:txBody>
+                  <a:tcPr marL="68580" marR="68580" marT="0" marB="0">
                     <a:lnT w="12700" cap="flat" cmpd="sng" algn="ctr">
                       <a:solidFill>
                         <a:schemeClr val="tx1"/>
@@ -13472,17 +13690,23 @@
                         <a:buNone/>
                       </a:pPr>
                       <a:r>
-                        <a:rPr lang="es-ES_tradnl" sz="900" dirty="0">
+                        <a:rPr lang="es-ES" sz="900">
                           <a:effectLst/>
                           <a:latin typeface="Times New Roman" panose="02020603050405020304" pitchFamily="18" charset="0"/>
                           <a:ea typeface="Times New Roman" panose="02020603050405020304" pitchFamily="18" charset="0"/>
                           <a:cs typeface="Times New Roman" panose="02020603050405020304" pitchFamily="18" charset="0"/>
                         </a:rPr>
-                        <a:t>17.71</a:t>
-                      </a:r>
-                    </a:p>
-                  </a:txBody>
-                  <a:tcPr marL="68580" marR="68580" marT="0" marB="0" anchor="ctr">
+                        <a:t>31.75</a:t>
+                      </a:r>
+                      <a:endParaRPr lang="de-DE" sz="900">
+                        <a:effectLst/>
+                        <a:latin typeface="Times New Roman" panose="02020603050405020304" pitchFamily="18" charset="0"/>
+                        <a:ea typeface="Times New Roman" panose="02020603050405020304" pitchFamily="18" charset="0"/>
+                        <a:cs typeface="Times New Roman" panose="02020603050405020304" pitchFamily="18" charset="0"/>
+                      </a:endParaRPr>
+                    </a:p>
+                  </a:txBody>
+                  <a:tcPr marL="68580" marR="68580" marT="0" marB="0">
                     <a:lnT w="12700" cap="flat" cmpd="sng" algn="ctr">
                       <a:solidFill>
                         <a:schemeClr val="tx1"/>
@@ -13504,17 +13728,23 @@
                         <a:buNone/>
                       </a:pPr>
                       <a:r>
-                        <a:rPr lang="es-ES_tradnl" sz="900" dirty="0">
+                        <a:rPr lang="es-ES" sz="900">
                           <a:effectLst/>
                           <a:latin typeface="Times New Roman" panose="02020603050405020304" pitchFamily="18" charset="0"/>
                           <a:ea typeface="Times New Roman" panose="02020603050405020304" pitchFamily="18" charset="0"/>
                           <a:cs typeface="Times New Roman" panose="02020603050405020304" pitchFamily="18" charset="0"/>
                         </a:rPr>
-                        <a:t>73.01</a:t>
-                      </a:r>
-                    </a:p>
-                  </a:txBody>
-                  <a:tcPr marL="68580" marR="68580" marT="0" marB="0" anchor="ctr">
+                        <a:t>NaN</a:t>
+                      </a:r>
+                      <a:endParaRPr lang="de-DE" sz="900">
+                        <a:effectLst/>
+                        <a:latin typeface="Times New Roman" panose="02020603050405020304" pitchFamily="18" charset="0"/>
+                        <a:ea typeface="Times New Roman" panose="02020603050405020304" pitchFamily="18" charset="0"/>
+                        <a:cs typeface="Times New Roman" panose="02020603050405020304" pitchFamily="18" charset="0"/>
+                      </a:endParaRPr>
+                    </a:p>
+                  </a:txBody>
+                  <a:tcPr marL="68580" marR="68580" marT="0" marB="0">
                     <a:lnT w="12700" cap="flat" cmpd="sng" algn="ctr">
                       <a:solidFill>
                         <a:schemeClr val="tx1"/>
@@ -13799,99 +14029,123 @@
                         <a:buNone/>
                       </a:pPr>
                       <a:r>
-                        <a:rPr lang="es-ES_tradnl" sz="900" dirty="0">
+                        <a:rPr lang="es-ES" sz="900">
                           <a:effectLst/>
                           <a:latin typeface="Times New Roman" panose="02020603050405020304" pitchFamily="18" charset="0"/>
                           <a:ea typeface="Times New Roman" panose="02020603050405020304" pitchFamily="18" charset="0"/>
                           <a:cs typeface="Times New Roman" panose="02020603050405020304" pitchFamily="18" charset="0"/>
                         </a:rPr>
-                        <a:t>3.70</a:t>
-                      </a:r>
-                    </a:p>
-                  </a:txBody>
-                  <a:tcPr marL="68580" marR="68580" marT="0" marB="0" anchor="ctr">
-                    <a:noFill/>
-                  </a:tcPr>
-                </a:tc>
-                <a:tc>
-                  <a:txBody>
-                    <a:bodyPr/>
-                    <a:lstStyle/>
-                    <a:p>
-                      <a:pPr algn="ctr">
-                        <a:buNone/>
-                      </a:pPr>
-                      <a:r>
-                        <a:rPr lang="es-ES_tradnl" sz="900" dirty="0">
+                        <a:t>2.68</a:t>
+                      </a:r>
+                      <a:endParaRPr lang="de-DE" sz="900">
+                        <a:effectLst/>
+                        <a:latin typeface="Times New Roman" panose="02020603050405020304" pitchFamily="18" charset="0"/>
+                        <a:ea typeface="Times New Roman" panose="02020603050405020304" pitchFamily="18" charset="0"/>
+                        <a:cs typeface="Times New Roman" panose="02020603050405020304" pitchFamily="18" charset="0"/>
+                      </a:endParaRPr>
+                    </a:p>
+                  </a:txBody>
+                  <a:tcPr marL="68580" marR="68580" marT="0" marB="0">
+                    <a:noFill/>
+                  </a:tcPr>
+                </a:tc>
+                <a:tc>
+                  <a:txBody>
+                    <a:bodyPr/>
+                    <a:lstStyle/>
+                    <a:p>
+                      <a:pPr algn="ctr">
+                        <a:buNone/>
+                      </a:pPr>
+                      <a:r>
+                        <a:rPr lang="es-ES" sz="900">
                           <a:effectLst/>
                           <a:latin typeface="Times New Roman" panose="02020603050405020304" pitchFamily="18" charset="0"/>
                           <a:ea typeface="Times New Roman" panose="02020603050405020304" pitchFamily="18" charset="0"/>
                           <a:cs typeface="Times New Roman" panose="02020603050405020304" pitchFamily="18" charset="0"/>
                         </a:rPr>
-                        <a:t>75.09</a:t>
-                      </a:r>
-                    </a:p>
-                  </a:txBody>
-                  <a:tcPr marL="68580" marR="68580" marT="0" marB="0" anchor="ctr">
-                    <a:noFill/>
-                  </a:tcPr>
-                </a:tc>
-                <a:tc>
-                  <a:txBody>
-                    <a:bodyPr/>
-                    <a:lstStyle/>
-                    <a:p>
-                      <a:pPr algn="ctr">
-                        <a:buNone/>
-                      </a:pPr>
-                      <a:r>
-                        <a:rPr lang="es-ES_tradnl" sz="900" dirty="0">
+                        <a:t>41.06</a:t>
+                      </a:r>
+                      <a:endParaRPr lang="de-DE" sz="900">
+                        <a:effectLst/>
+                        <a:latin typeface="Times New Roman" panose="02020603050405020304" pitchFamily="18" charset="0"/>
+                        <a:ea typeface="Times New Roman" panose="02020603050405020304" pitchFamily="18" charset="0"/>
+                        <a:cs typeface="Times New Roman" panose="02020603050405020304" pitchFamily="18" charset="0"/>
+                      </a:endParaRPr>
+                    </a:p>
+                  </a:txBody>
+                  <a:tcPr marL="68580" marR="68580" marT="0" marB="0">
+                    <a:noFill/>
+                  </a:tcPr>
+                </a:tc>
+                <a:tc>
+                  <a:txBody>
+                    <a:bodyPr/>
+                    <a:lstStyle/>
+                    <a:p>
+                      <a:pPr algn="ctr">
+                        <a:buNone/>
+                      </a:pPr>
+                      <a:r>
+                        <a:rPr lang="es-ES" sz="900">
                           <a:effectLst/>
                           <a:latin typeface="Times New Roman" panose="02020603050405020304" pitchFamily="18" charset="0"/>
                           <a:ea typeface="Times New Roman" panose="02020603050405020304" pitchFamily="18" charset="0"/>
                           <a:cs typeface="Times New Roman" panose="02020603050405020304" pitchFamily="18" charset="0"/>
                         </a:rPr>
-                        <a:t>18.45</a:t>
-                      </a:r>
-                    </a:p>
-                  </a:txBody>
-                  <a:tcPr marL="68580" marR="68580" marT="0" marB="0" anchor="ctr">
-                    <a:noFill/>
-                  </a:tcPr>
-                </a:tc>
-                <a:tc>
-                  <a:txBody>
-                    <a:bodyPr/>
-                    <a:lstStyle/>
-                    <a:p>
-                      <a:pPr algn="ctr">
-                        <a:buNone/>
-                      </a:pPr>
-                      <a:r>
-                        <a:rPr lang="es-ES_tradnl" sz="900" dirty="0">
+                        <a:t>14.84</a:t>
+                      </a:r>
+                      <a:endParaRPr lang="de-DE" sz="900">
+                        <a:effectLst/>
+                        <a:latin typeface="Times New Roman" panose="02020603050405020304" pitchFamily="18" charset="0"/>
+                        <a:ea typeface="Times New Roman" panose="02020603050405020304" pitchFamily="18" charset="0"/>
+                        <a:cs typeface="Times New Roman" panose="02020603050405020304" pitchFamily="18" charset="0"/>
+                      </a:endParaRPr>
+                    </a:p>
+                  </a:txBody>
+                  <a:tcPr marL="68580" marR="68580" marT="0" marB="0">
+                    <a:noFill/>
+                  </a:tcPr>
+                </a:tc>
+                <a:tc>
+                  <a:txBody>
+                    <a:bodyPr/>
+                    <a:lstStyle/>
+                    <a:p>
+                      <a:pPr algn="ctr">
+                        <a:buNone/>
+                      </a:pPr>
+                      <a:r>
+                        <a:rPr lang="es-ES" sz="900">
                           <a:effectLst/>
                           <a:latin typeface="Times New Roman" panose="02020603050405020304" pitchFamily="18" charset="0"/>
                           <a:ea typeface="Times New Roman" panose="02020603050405020304" pitchFamily="18" charset="0"/>
                           <a:cs typeface="Times New Roman" panose="02020603050405020304" pitchFamily="18" charset="0"/>
                         </a:rPr>
-                        <a:t>57.05</a:t>
-                      </a:r>
-                    </a:p>
-                  </a:txBody>
-                  <a:tcPr marL="68580" marR="68580" marT="0" marB="0" anchor="ctr">
-                    <a:noFill/>
-                  </a:tcPr>
-                </a:tc>
-                <a:tc>
-                  <a:txBody>
-                    <a:bodyPr/>
-                    <a:lstStyle/>
-                    <a:p>
-                      <a:pPr algn="ctr">
-                        <a:buNone/>
-                      </a:pPr>
-                      <a:r>
-                        <a:rPr lang="es-ES_tradnl" sz="900" dirty="0">
+                        <a:t>30.93</a:t>
+                      </a:r>
+                      <a:endParaRPr lang="de-DE" sz="900">
+                        <a:effectLst/>
+                        <a:latin typeface="Times New Roman" panose="02020603050405020304" pitchFamily="18" charset="0"/>
+                        <a:ea typeface="Times New Roman" panose="02020603050405020304" pitchFamily="18" charset="0"/>
+                        <a:cs typeface="Times New Roman" panose="02020603050405020304" pitchFamily="18" charset="0"/>
+                      </a:endParaRPr>
+                    </a:p>
+                  </a:txBody>
+                  <a:tcPr marL="68580" marR="68580" marT="0" marB="0">
+                    <a:noFill/>
+                  </a:tcPr>
+                </a:tc>
+                <a:tc>
+                  <a:txBody>
+                    <a:bodyPr/>
+                    <a:lstStyle/>
+                    <a:p>
+                      <a:pPr algn="ctr">
+                        <a:buNone/>
+                      </a:pPr>
+                      <a:r>
+                        <a:rPr lang="es-ES" sz="900">
                           <a:effectLst/>
                           <a:latin typeface="Times New Roman" panose="02020603050405020304" pitchFamily="18" charset="0"/>
                           <a:ea typeface="Times New Roman" panose="02020603050405020304" pitchFamily="18" charset="0"/>
@@ -13899,9 +14153,15 @@
                         </a:rPr>
                         <a:t>NaN</a:t>
                       </a:r>
-                    </a:p>
-                  </a:txBody>
-                  <a:tcPr marL="68580" marR="68580" marT="0" marB="0" anchor="ctr">
+                      <a:endParaRPr lang="de-DE" sz="900">
+                        <a:effectLst/>
+                        <a:latin typeface="Times New Roman" panose="02020603050405020304" pitchFamily="18" charset="0"/>
+                        <a:ea typeface="Times New Roman" panose="02020603050405020304" pitchFamily="18" charset="0"/>
+                        <a:cs typeface="Times New Roman" panose="02020603050405020304" pitchFamily="18" charset="0"/>
+                      </a:endParaRPr>
+                    </a:p>
+                  </a:txBody>
+                  <a:tcPr marL="68580" marR="68580" marT="0" marB="0">
                     <a:noFill/>
                   </a:tcPr>
                 </a:tc>
@@ -14177,99 +14437,123 @@
                         <a:buNone/>
                       </a:pPr>
                       <a:r>
-                        <a:rPr lang="es-ES_tradnl" sz="900" dirty="0">
+                        <a:rPr lang="es-ES" sz="900">
                           <a:effectLst/>
                           <a:latin typeface="Times New Roman" panose="02020603050405020304" pitchFamily="18" charset="0"/>
                           <a:ea typeface="Times New Roman" panose="02020603050405020304" pitchFamily="18" charset="0"/>
                           <a:cs typeface="Times New Roman" panose="02020603050405020304" pitchFamily="18" charset="0"/>
                         </a:rPr>
-                        <a:t>4.14</a:t>
-                      </a:r>
-                    </a:p>
-                  </a:txBody>
-                  <a:tcPr marL="68580" marR="68580" marT="0" marB="0" anchor="ctr">
-                    <a:noFill/>
-                  </a:tcPr>
-                </a:tc>
-                <a:tc>
-                  <a:txBody>
-                    <a:bodyPr/>
-                    <a:lstStyle/>
-                    <a:p>
-                      <a:pPr algn="ctr">
-                        <a:buNone/>
-                      </a:pPr>
-                      <a:r>
-                        <a:rPr lang="es-ES_tradnl" sz="900" dirty="0">
+                        <a:t>2.81</a:t>
+                      </a:r>
+                      <a:endParaRPr lang="de-DE" sz="900">
+                        <a:effectLst/>
+                        <a:latin typeface="Times New Roman" panose="02020603050405020304" pitchFamily="18" charset="0"/>
+                        <a:ea typeface="Times New Roman" panose="02020603050405020304" pitchFamily="18" charset="0"/>
+                        <a:cs typeface="Times New Roman" panose="02020603050405020304" pitchFamily="18" charset="0"/>
+                      </a:endParaRPr>
+                    </a:p>
+                  </a:txBody>
+                  <a:tcPr marL="68580" marR="68580" marT="0" marB="0">
+                    <a:noFill/>
+                  </a:tcPr>
+                </a:tc>
+                <a:tc>
+                  <a:txBody>
+                    <a:bodyPr/>
+                    <a:lstStyle/>
+                    <a:p>
+                      <a:pPr algn="ctr">
+                        <a:buNone/>
+                      </a:pPr>
+                      <a:r>
+                        <a:rPr lang="es-ES" sz="900">
                           <a:effectLst/>
                           <a:latin typeface="Times New Roman" panose="02020603050405020304" pitchFamily="18" charset="0"/>
                           <a:ea typeface="Times New Roman" panose="02020603050405020304" pitchFamily="18" charset="0"/>
                           <a:cs typeface="Times New Roman" panose="02020603050405020304" pitchFamily="18" charset="0"/>
                         </a:rPr>
-                        <a:t>94.38</a:t>
-                      </a:r>
-                    </a:p>
-                  </a:txBody>
-                  <a:tcPr marL="68580" marR="68580" marT="0" marB="0" anchor="ctr">
-                    <a:noFill/>
-                  </a:tcPr>
-                </a:tc>
-                <a:tc>
-                  <a:txBody>
-                    <a:bodyPr/>
-                    <a:lstStyle/>
-                    <a:p>
-                      <a:pPr algn="ctr">
-                        <a:buNone/>
-                      </a:pPr>
-                      <a:r>
-                        <a:rPr lang="es-ES_tradnl" sz="900" dirty="0">
+                        <a:t>45.34</a:t>
+                      </a:r>
+                      <a:endParaRPr lang="de-DE" sz="900">
+                        <a:effectLst/>
+                        <a:latin typeface="Times New Roman" panose="02020603050405020304" pitchFamily="18" charset="0"/>
+                        <a:ea typeface="Times New Roman" panose="02020603050405020304" pitchFamily="18" charset="0"/>
+                        <a:cs typeface="Times New Roman" panose="02020603050405020304" pitchFamily="18" charset="0"/>
+                      </a:endParaRPr>
+                    </a:p>
+                  </a:txBody>
+                  <a:tcPr marL="68580" marR="68580" marT="0" marB="0">
+                    <a:noFill/>
+                  </a:tcPr>
+                </a:tc>
+                <a:tc>
+                  <a:txBody>
+                    <a:bodyPr/>
+                    <a:lstStyle/>
+                    <a:p>
+                      <a:pPr algn="ctr">
+                        <a:buNone/>
+                      </a:pPr>
+                      <a:r>
+                        <a:rPr lang="es-ES" sz="900">
                           <a:effectLst/>
                           <a:latin typeface="Times New Roman" panose="02020603050405020304" pitchFamily="18" charset="0"/>
                           <a:ea typeface="Times New Roman" panose="02020603050405020304" pitchFamily="18" charset="0"/>
                           <a:cs typeface="Times New Roman" panose="02020603050405020304" pitchFamily="18" charset="0"/>
                         </a:rPr>
-                        <a:t>19.92</a:t>
-                      </a:r>
-                    </a:p>
-                  </a:txBody>
-                  <a:tcPr marL="68580" marR="68580" marT="0" marB="0" anchor="ctr">
-                    <a:noFill/>
-                  </a:tcPr>
-                </a:tc>
-                <a:tc>
-                  <a:txBody>
-                    <a:bodyPr/>
-                    <a:lstStyle/>
-                    <a:p>
-                      <a:pPr algn="ctr">
-                        <a:buNone/>
-                      </a:pPr>
-                      <a:r>
-                        <a:rPr lang="es-ES_tradnl" sz="900" dirty="0">
+                        <a:t>15.38</a:t>
+                      </a:r>
+                      <a:endParaRPr lang="de-DE" sz="900">
+                        <a:effectLst/>
+                        <a:latin typeface="Times New Roman" panose="02020603050405020304" pitchFamily="18" charset="0"/>
+                        <a:ea typeface="Times New Roman" panose="02020603050405020304" pitchFamily="18" charset="0"/>
+                        <a:cs typeface="Times New Roman" panose="02020603050405020304" pitchFamily="18" charset="0"/>
+                      </a:endParaRPr>
+                    </a:p>
+                  </a:txBody>
+                  <a:tcPr marL="68580" marR="68580" marT="0" marB="0">
+                    <a:noFill/>
+                  </a:tcPr>
+                </a:tc>
+                <a:tc>
+                  <a:txBody>
+                    <a:bodyPr/>
+                    <a:lstStyle/>
+                    <a:p>
+                      <a:pPr algn="ctr">
+                        <a:buNone/>
+                      </a:pPr>
+                      <a:r>
+                        <a:rPr lang="es-ES" sz="900">
                           <a:effectLst/>
                           <a:latin typeface="Times New Roman" panose="02020603050405020304" pitchFamily="18" charset="0"/>
                           <a:ea typeface="Times New Roman" panose="02020603050405020304" pitchFamily="18" charset="0"/>
                           <a:cs typeface="Times New Roman" panose="02020603050405020304" pitchFamily="18" charset="0"/>
                         </a:rPr>
-                        <a:t>57.53</a:t>
-                      </a:r>
-                    </a:p>
-                  </a:txBody>
-                  <a:tcPr marL="68580" marR="68580" marT="0" marB="0" anchor="ctr">
-                    <a:noFill/>
-                  </a:tcPr>
-                </a:tc>
-                <a:tc>
-                  <a:txBody>
-                    <a:bodyPr/>
-                    <a:lstStyle/>
-                    <a:p>
-                      <a:pPr algn="ctr">
-                        <a:buNone/>
-                      </a:pPr>
-                      <a:r>
-                        <a:rPr lang="es-ES_tradnl" sz="900" dirty="0">
+                        <a:t>59.32</a:t>
+                      </a:r>
+                      <a:endParaRPr lang="de-DE" sz="900">
+                        <a:effectLst/>
+                        <a:latin typeface="Times New Roman" panose="02020603050405020304" pitchFamily="18" charset="0"/>
+                        <a:ea typeface="Times New Roman" panose="02020603050405020304" pitchFamily="18" charset="0"/>
+                        <a:cs typeface="Times New Roman" panose="02020603050405020304" pitchFamily="18" charset="0"/>
+                      </a:endParaRPr>
+                    </a:p>
+                  </a:txBody>
+                  <a:tcPr marL="68580" marR="68580" marT="0" marB="0">
+                    <a:noFill/>
+                  </a:tcPr>
+                </a:tc>
+                <a:tc>
+                  <a:txBody>
+                    <a:bodyPr/>
+                    <a:lstStyle/>
+                    <a:p>
+                      <a:pPr algn="ctr">
+                        <a:buNone/>
+                      </a:pPr>
+                      <a:r>
+                        <a:rPr lang="es-ES" sz="900" dirty="0">
                           <a:effectLst/>
                           <a:latin typeface="Times New Roman" panose="02020603050405020304" pitchFamily="18" charset="0"/>
                           <a:ea typeface="Times New Roman" panose="02020603050405020304" pitchFamily="18" charset="0"/>
@@ -14277,9 +14561,15 @@
                         </a:rPr>
                         <a:t>NaN</a:t>
                       </a:r>
-                    </a:p>
-                  </a:txBody>
-                  <a:tcPr marL="68580" marR="68580" marT="0" marB="0" anchor="ctr">
+                      <a:endParaRPr lang="de-DE" sz="900" dirty="0">
+                        <a:effectLst/>
+                        <a:latin typeface="Times New Roman" panose="02020603050405020304" pitchFamily="18" charset="0"/>
+                        <a:ea typeface="Times New Roman" panose="02020603050405020304" pitchFamily="18" charset="0"/>
+                        <a:cs typeface="Times New Roman" panose="02020603050405020304" pitchFamily="18" charset="0"/>
+                      </a:endParaRPr>
+                    </a:p>
+                  </a:txBody>
+                  <a:tcPr marL="68580" marR="68580" marT="0" marB="0">
                     <a:noFill/>
                   </a:tcPr>
                 </a:tc>
@@ -15137,38 +15427,6 @@
           </a:p>
         </p:txBody>
       </p:sp>
-      <p:pic>
-        <p:nvPicPr>
-          <p:cNvPr id="5" name="Onlinebild-Platzhalter 4">
-            <a:extLst>
-              <a:ext uri="{FF2B5EF4-FFF2-40B4-BE49-F238E27FC236}">
-                <a16:creationId xmlns:a16="http://schemas.microsoft.com/office/drawing/2014/main" id="{F80598DC-11B3-31E9-509B-7FF31C657411}"/>
-              </a:ext>
-            </a:extLst>
-          </p:cNvPr>
-          <p:cNvPicPr>
-            <a:picLocks noGrp="1" noChangeAspect="1"/>
-          </p:cNvPicPr>
-          <p:nvPr>
-            <p:ph type="clipArt" sz="quarter" idx="15"/>
-          </p:nvPr>
-        </p:nvPicPr>
-        <p:blipFill>
-          <a:blip r:embed="rId2"/>
-          <a:stretch>
-            <a:fillRect/>
-          </a:stretch>
-        </p:blipFill>
-        <p:spPr>
-          <a:xfrm>
-            <a:off x="3454400" y="2078038"/>
-            <a:ext cx="6784622" cy="2505075"/>
-          </a:xfrm>
-          <a:prstGeom prst="rect">
-            <a:avLst/>
-          </a:prstGeom>
-        </p:spPr>
-      </p:pic>
       <p:sp>
         <p:nvSpPr>
           <p:cNvPr id="2" name="Fußzeilenplatzhalter 2">
@@ -15298,6 +15556,38 @@
           </a:p>
         </p:txBody>
       </p:sp>
+      <p:pic>
+        <p:nvPicPr>
+          <p:cNvPr id="9" name="Onlinebild-Platzhalter 8">
+            <a:extLst>
+              <a:ext uri="{FF2B5EF4-FFF2-40B4-BE49-F238E27FC236}">
+                <a16:creationId xmlns:a16="http://schemas.microsoft.com/office/drawing/2014/main" id="{DC180E20-0DD6-5AAF-EB5C-6EEF30BB6925}"/>
+              </a:ext>
+            </a:extLst>
+          </p:cNvPr>
+          <p:cNvPicPr>
+            <a:picLocks noGrp="1" noChangeAspect="1"/>
+          </p:cNvPicPr>
+          <p:nvPr>
+            <p:ph type="clipArt" sz="quarter" idx="15"/>
+          </p:nvPr>
+        </p:nvPicPr>
+        <p:blipFill>
+          <a:blip r:embed="rId2"/>
+          <a:stretch>
+            <a:fillRect/>
+          </a:stretch>
+        </p:blipFill>
+        <p:spPr>
+          <a:xfrm>
+            <a:off x="3449171" y="2078038"/>
+            <a:ext cx="6078070" cy="2505075"/>
+          </a:xfrm>
+          <a:prstGeom prst="rect">
+            <a:avLst/>
+          </a:prstGeom>
+        </p:spPr>
+      </p:pic>
     </p:spTree>
     <p:extLst>
       <p:ext uri="{BB962C8B-B14F-4D97-AF65-F5344CB8AC3E}">
